--- a/docs/presentations/Transfer_Agent_Data_Flow.pptx
+++ b/docs/presentations/Transfer_Agent_Data_Flow.pptx
@@ -1707,8 +1707,8 @@
         </p:nvSpPr>
         <p:spPr>
           <a:xfrm>
-            <a:off x="4416552" y="3392424"/>
-            <a:ext cx="1691640" cy="2514600"/>
+            <a:off x="4297680" y="3337560"/>
+            <a:ext cx="1874520" cy="219456"/>
           </a:xfrm>
           <a:prstGeom prst="rect">
             <a:avLst/>
@@ -1717,21 +1717,97 @@
           <a:ln/>
         </p:spPr>
         <p:txBody>
-          <a:bodyPr wrap="square" lIns="0" tIns="0" rIns="0" bIns="0" rtlCol="0" anchor="t"/>
+          <a:bodyPr wrap="square" lIns="0" tIns="0" rIns="0" bIns="0" rtlCol="0" anchor="ctr"/>
           <a:lstStyle/>
           <a:p>
-            <a:pPr algn="l" marL="342900" indent="-342900">
-              <a:lnSpc>
-                <a:spcPct val="130000"/>
-              </a:lnSpc>
-              <a:spcAft>
-                <a:spcPts val="900"/>
-              </a:spcAft>
-              <a:buSzPct val="100000"/>
-              <a:buChar char="•"/>
+            <a:pPr algn="ctr" indent="0" marL="0">
+              <a:buNone/>
             </a:pPr>
             <a:r>
-              <a:rPr lang="en-US" sz="1050" dirty="0">
+              <a:rPr lang="en-US" sz="900" b="1" spc="150" kern="0" dirty="0">
+                <a:solidFill>
+                  <a:srgbClr val="8891B3"/>
+                </a:solidFill>
+                <a:latin typeface="Calibri" pitchFamily="34" charset="0"/>
+                <a:ea typeface="Calibri" pitchFamily="34" charset="-122"/>
+                <a:cs typeface="Calibri" pitchFamily="34" charset="-120"/>
+              </a:rPr>
+              <a:t>DATA IN TRANSIT</a:t>
+            </a:r>
+            <a:endParaRPr lang="en-US" sz="900" dirty="0"/>
+          </a:p>
+        </p:txBody>
+      </p:sp>
+      <p:sp>
+        <p:nvSpPr>
+          <p:cNvPr id="17" name="Shape 14"/>
+          <p:cNvSpPr/>
+          <p:nvPr/>
+        </p:nvSpPr>
+        <p:spPr>
+          <a:xfrm>
+            <a:off x="4361688" y="3680460"/>
+            <a:ext cx="274320" cy="274320"/>
+          </a:xfrm>
+          <a:prstGeom prst="ellipse">
+            <a:avLst/>
+          </a:prstGeom>
+          <a:solidFill>
+            <a:srgbClr val="3A4694"/>
+          </a:solidFill>
+          <a:ln/>
+        </p:spPr>
+      </p:sp>
+      <p:pic>
+        <p:nvPicPr>
+          <p:cNvPr id="18" name="Image 1" descr="preencoded.png">    </p:cNvPr>
+          <p:cNvPicPr>
+            <a:picLocks noChangeAspect="1"/>
+          </p:cNvPicPr>
+          <p:nvPr/>
+        </p:nvPicPr>
+        <p:blipFill>
+          <a:blip r:embed="rId2"/>
+          <a:stretch>
+            <a:fillRect/>
+          </a:stretch>
+        </p:blipFill>
+        <p:spPr>
+          <a:xfrm>
+            <a:off x="4433011" y="3751783"/>
+            <a:ext cx="131674" cy="131674"/>
+          </a:xfrm>
+          <a:prstGeom prst="rect">
+            <a:avLst/>
+          </a:prstGeom>
+        </p:spPr>
+      </p:pic>
+      <p:sp>
+        <p:nvSpPr>
+          <p:cNvPr id="19" name="Text 15"/>
+          <p:cNvSpPr txBox="1"/>
+          <p:nvPr/>
+        </p:nvSpPr>
+        <p:spPr>
+          <a:xfrm>
+            <a:off x="4764024" y="3648456"/>
+            <a:ext cx="1408176" cy="338328"/>
+          </a:xfrm>
+          <a:prstGeom prst="rect">
+            <a:avLst/>
+          </a:prstGeom>
+          <a:noFill/>
+          <a:ln/>
+        </p:spPr>
+        <p:txBody>
+          <a:bodyPr wrap="square" lIns="0" tIns="0" rIns="0" bIns="0" rtlCol="0" anchor="ctr"/>
+          <a:lstStyle/>
+          <a:p>
+            <a:pPr algn="l" indent="0" marL="0">
+              <a:buNone/>
+            </a:pPr>
+            <a:r>
+              <a:rPr lang="en-US" sz="1150" b="1" dirty="0">
                 <a:solidFill>
                   <a:srgbClr val="CADCFC"/>
                 </a:solidFill>
@@ -1739,23 +1815,82 @@
                 <a:ea typeface="Calibri" pitchFamily="34" charset="-122"/>
                 <a:cs typeface="Calibri" pitchFamily="34" charset="-120"/>
               </a:rPr>
-              <a:t>Order processing &amp; NAV application</a:t>
-            </a:r>
-            <a:endParaRPr lang="en-US" sz="1050" dirty="0"/>
-          </a:p>
-          <a:p>
-            <a:pPr algn="l" marL="342900" indent="-342900">
-              <a:lnSpc>
-                <a:spcPct val="130000"/>
-              </a:lnSpc>
-              <a:spcAft>
-                <a:spcPts val="900"/>
-              </a:spcAft>
-              <a:buSzPct val="100000"/>
-              <a:buChar char="•"/>
+              <a:t>Orders</a:t>
+            </a:r>
+            <a:endParaRPr lang="en-US" sz="1150" dirty="0"/>
+          </a:p>
+        </p:txBody>
+      </p:sp>
+      <p:sp>
+        <p:nvSpPr>
+          <p:cNvPr id="20" name="Shape 16"/>
+          <p:cNvSpPr/>
+          <p:nvPr/>
+        </p:nvSpPr>
+        <p:spPr>
+          <a:xfrm>
+            <a:off x="4361688" y="4055364"/>
+            <a:ext cx="274320" cy="274320"/>
+          </a:xfrm>
+          <a:prstGeom prst="ellipse">
+            <a:avLst/>
+          </a:prstGeom>
+          <a:solidFill>
+            <a:srgbClr val="3A4694"/>
+          </a:solidFill>
+          <a:ln/>
+        </p:spPr>
+      </p:sp>
+      <p:pic>
+        <p:nvPicPr>
+          <p:cNvPr id="21" name="Image 2" descr="preencoded.png">    </p:cNvPr>
+          <p:cNvPicPr>
+            <a:picLocks noChangeAspect="1"/>
+          </p:cNvPicPr>
+          <p:nvPr/>
+        </p:nvPicPr>
+        <p:blipFill>
+          <a:blip r:embed="rId3"/>
+          <a:stretch>
+            <a:fillRect/>
+          </a:stretch>
+        </p:blipFill>
+        <p:spPr>
+          <a:xfrm>
+            <a:off x="4433011" y="4126687"/>
+            <a:ext cx="131674" cy="131674"/>
+          </a:xfrm>
+          <a:prstGeom prst="rect">
+            <a:avLst/>
+          </a:prstGeom>
+        </p:spPr>
+      </p:pic>
+      <p:sp>
+        <p:nvSpPr>
+          <p:cNvPr id="22" name="Text 17"/>
+          <p:cNvSpPr txBox="1"/>
+          <p:nvPr/>
+        </p:nvSpPr>
+        <p:spPr>
+          <a:xfrm>
+            <a:off x="4764024" y="4023360"/>
+            <a:ext cx="1408176" cy="338328"/>
+          </a:xfrm>
+          <a:prstGeom prst="rect">
+            <a:avLst/>
+          </a:prstGeom>
+          <a:noFill/>
+          <a:ln/>
+        </p:spPr>
+        <p:txBody>
+          <a:bodyPr wrap="square" lIns="0" tIns="0" rIns="0" bIns="0" rtlCol="0" anchor="ctr"/>
+          <a:lstStyle/>
+          <a:p>
+            <a:pPr algn="l" indent="0" marL="0">
+              <a:buNone/>
             </a:pPr>
             <a:r>
-              <a:rPr lang="en-US" sz="1050" dirty="0">
+              <a:rPr lang="en-US" sz="1150" b="1" dirty="0">
                 <a:solidFill>
                   <a:srgbClr val="CADCFC"/>
                 </a:solidFill>
@@ -1763,23 +1898,82 @@
                 <a:ea typeface="Calibri" pitchFamily="34" charset="-122"/>
                 <a:cs typeface="Calibri" pitchFamily="34" charset="-120"/>
               </a:rPr>
-              <a:t>Master securityholder file</a:t>
-            </a:r>
-            <a:endParaRPr lang="en-US" sz="1050" dirty="0"/>
-          </a:p>
-          <a:p>
-            <a:pPr algn="l" marL="342900" indent="-342900">
-              <a:lnSpc>
-                <a:spcPct val="130000"/>
-              </a:lnSpc>
-              <a:spcAft>
-                <a:spcPts val="900"/>
-              </a:spcAft>
-              <a:buSzPct val="100000"/>
-              <a:buChar char="•"/>
+              <a:t>Cash</a:t>
+            </a:r>
+            <a:endParaRPr lang="en-US" sz="1150" dirty="0"/>
+          </a:p>
+        </p:txBody>
+      </p:sp>
+      <p:sp>
+        <p:nvSpPr>
+          <p:cNvPr id="23" name="Shape 18"/>
+          <p:cNvSpPr/>
+          <p:nvPr/>
+        </p:nvSpPr>
+        <p:spPr>
+          <a:xfrm>
+            <a:off x="4361688" y="4430268"/>
+            <a:ext cx="274320" cy="274320"/>
+          </a:xfrm>
+          <a:prstGeom prst="ellipse">
+            <a:avLst/>
+          </a:prstGeom>
+          <a:solidFill>
+            <a:srgbClr val="3A4694"/>
+          </a:solidFill>
+          <a:ln/>
+        </p:spPr>
+      </p:sp>
+      <p:pic>
+        <p:nvPicPr>
+          <p:cNvPr id="24" name="Image 3" descr="preencoded.png">    </p:cNvPr>
+          <p:cNvPicPr>
+            <a:picLocks noChangeAspect="1"/>
+          </p:cNvPicPr>
+          <p:nvPr/>
+        </p:nvPicPr>
+        <p:blipFill>
+          <a:blip r:embed="rId4"/>
+          <a:stretch>
+            <a:fillRect/>
+          </a:stretch>
+        </p:blipFill>
+        <p:spPr>
+          <a:xfrm>
+            <a:off x="4433011" y="4501591"/>
+            <a:ext cx="131674" cy="131674"/>
+          </a:xfrm>
+          <a:prstGeom prst="rect">
+            <a:avLst/>
+          </a:prstGeom>
+        </p:spPr>
+      </p:pic>
+      <p:sp>
+        <p:nvSpPr>
+          <p:cNvPr id="25" name="Text 19"/>
+          <p:cNvSpPr txBox="1"/>
+          <p:nvPr/>
+        </p:nvSpPr>
+        <p:spPr>
+          <a:xfrm>
+            <a:off x="4764024" y="4398264"/>
+            <a:ext cx="1408176" cy="338328"/>
+          </a:xfrm>
+          <a:prstGeom prst="rect">
+            <a:avLst/>
+          </a:prstGeom>
+          <a:noFill/>
+          <a:ln/>
+        </p:spPr>
+        <p:txBody>
+          <a:bodyPr wrap="square" lIns="0" tIns="0" rIns="0" bIns="0" rtlCol="0" anchor="ctr"/>
+          <a:lstStyle/>
+          <a:p>
+            <a:pPr algn="l" indent="0" marL="0">
+              <a:buNone/>
             </a:pPr>
             <a:r>
-              <a:rPr lang="en-US" sz="1050" dirty="0">
+              <a:rPr lang="en-US" sz="1150" b="1" dirty="0">
                 <a:solidFill>
                   <a:srgbClr val="CADCFC"/>
                 </a:solidFill>
@@ -1787,23 +1981,82 @@
                 <a:ea typeface="Calibri" pitchFamily="34" charset="-122"/>
                 <a:cs typeface="Calibri" pitchFamily="34" charset="-120"/>
               </a:rPr>
-              <a:t>KYC/CIP &amp; AML/OFAC execution</a:t>
-            </a:r>
-            <a:endParaRPr lang="en-US" sz="1050" dirty="0"/>
-          </a:p>
-          <a:p>
-            <a:pPr algn="l" marL="342900" indent="-342900">
-              <a:lnSpc>
-                <a:spcPct val="130000"/>
-              </a:lnSpc>
-              <a:spcAft>
-                <a:spcPts val="900"/>
-              </a:spcAft>
-              <a:buSzPct val="100000"/>
-              <a:buChar char="•"/>
+              <a:t>Customer Info</a:t>
+            </a:r>
+            <a:endParaRPr lang="en-US" sz="1150" dirty="0"/>
+          </a:p>
+        </p:txBody>
+      </p:sp>
+      <p:sp>
+        <p:nvSpPr>
+          <p:cNvPr id="26" name="Shape 20"/>
+          <p:cNvSpPr/>
+          <p:nvPr/>
+        </p:nvSpPr>
+        <p:spPr>
+          <a:xfrm>
+            <a:off x="4361688" y="4805172"/>
+            <a:ext cx="274320" cy="274320"/>
+          </a:xfrm>
+          <a:prstGeom prst="ellipse">
+            <a:avLst/>
+          </a:prstGeom>
+          <a:solidFill>
+            <a:srgbClr val="3A4694"/>
+          </a:solidFill>
+          <a:ln/>
+        </p:spPr>
+      </p:sp>
+      <p:pic>
+        <p:nvPicPr>
+          <p:cNvPr id="27" name="Image 4" descr="preencoded.png">    </p:cNvPr>
+          <p:cNvPicPr>
+            <a:picLocks noChangeAspect="1"/>
+          </p:cNvPicPr>
+          <p:nvPr/>
+        </p:nvPicPr>
+        <p:blipFill>
+          <a:blip r:embed="rId5"/>
+          <a:stretch>
+            <a:fillRect/>
+          </a:stretch>
+        </p:blipFill>
+        <p:spPr>
+          <a:xfrm>
+            <a:off x="4433011" y="4876495"/>
+            <a:ext cx="131674" cy="131674"/>
+          </a:xfrm>
+          <a:prstGeom prst="rect">
+            <a:avLst/>
+          </a:prstGeom>
+        </p:spPr>
+      </p:pic>
+      <p:sp>
+        <p:nvSpPr>
+          <p:cNvPr id="28" name="Text 21"/>
+          <p:cNvSpPr txBox="1"/>
+          <p:nvPr/>
+        </p:nvSpPr>
+        <p:spPr>
+          <a:xfrm>
+            <a:off x="4764024" y="4773168"/>
+            <a:ext cx="1408176" cy="338328"/>
+          </a:xfrm>
+          <a:prstGeom prst="rect">
+            <a:avLst/>
+          </a:prstGeom>
+          <a:noFill/>
+          <a:ln/>
+        </p:spPr>
+        <p:txBody>
+          <a:bodyPr wrap="square" lIns="0" tIns="0" rIns="0" bIns="0" rtlCol="0" anchor="ctr"/>
+          <a:lstStyle/>
+          <a:p>
+            <a:pPr algn="l" indent="0" marL="0">
+              <a:buNone/>
             </a:pPr>
             <a:r>
-              <a:rPr lang="en-US" sz="1050" dirty="0">
+              <a:rPr lang="en-US" sz="1150" b="1" dirty="0">
                 <a:solidFill>
                   <a:srgbClr val="CADCFC"/>
                 </a:solidFill>
@@ -1811,15 +2064,181 @@
                 <a:ea typeface="Calibri" pitchFamily="34" charset="-122"/>
                 <a:cs typeface="Calibri" pitchFamily="34" charset="-120"/>
               </a:rPr>
-              <a:t>Statements, confirms &amp; tax reporting</a:t>
-            </a:r>
-            <a:endParaRPr lang="en-US" sz="1050" dirty="0"/>
+              <a:t>Tax Info</a:t>
+            </a:r>
+            <a:endParaRPr lang="en-US" sz="1150" dirty="0"/>
           </a:p>
         </p:txBody>
       </p:sp>
       <p:sp>
         <p:nvSpPr>
-          <p:cNvPr id="17" name="Shape 14"/>
+          <p:cNvPr id="29" name="Shape 22"/>
+          <p:cNvSpPr/>
+          <p:nvPr/>
+        </p:nvSpPr>
+        <p:spPr>
+          <a:xfrm>
+            <a:off x="4361688" y="5180076"/>
+            <a:ext cx="274320" cy="274320"/>
+          </a:xfrm>
+          <a:prstGeom prst="ellipse">
+            <a:avLst/>
+          </a:prstGeom>
+          <a:solidFill>
+            <a:srgbClr val="3A4694"/>
+          </a:solidFill>
+          <a:ln/>
+        </p:spPr>
+      </p:sp>
+      <p:pic>
+        <p:nvPicPr>
+          <p:cNvPr id="30" name="Image 5" descr="preencoded.png">    </p:cNvPr>
+          <p:cNvPicPr>
+            <a:picLocks noChangeAspect="1"/>
+          </p:cNvPicPr>
+          <p:nvPr/>
+        </p:nvPicPr>
+        <p:blipFill>
+          <a:blip r:embed="rId6"/>
+          <a:stretch>
+            <a:fillRect/>
+          </a:stretch>
+        </p:blipFill>
+        <p:spPr>
+          <a:xfrm>
+            <a:off x="4433011" y="5251399"/>
+            <a:ext cx="131674" cy="131674"/>
+          </a:xfrm>
+          <a:prstGeom prst="rect">
+            <a:avLst/>
+          </a:prstGeom>
+        </p:spPr>
+      </p:pic>
+      <p:sp>
+        <p:nvSpPr>
+          <p:cNvPr id="31" name="Text 23"/>
+          <p:cNvSpPr txBox="1"/>
+          <p:nvPr/>
+        </p:nvSpPr>
+        <p:spPr>
+          <a:xfrm>
+            <a:off x="4764024" y="5148072"/>
+            <a:ext cx="1408176" cy="338328"/>
+          </a:xfrm>
+          <a:prstGeom prst="rect">
+            <a:avLst/>
+          </a:prstGeom>
+          <a:noFill/>
+          <a:ln/>
+        </p:spPr>
+        <p:txBody>
+          <a:bodyPr wrap="square" lIns="0" tIns="0" rIns="0" bIns="0" rtlCol="0" anchor="ctr"/>
+          <a:lstStyle/>
+          <a:p>
+            <a:pPr algn="l" indent="0" marL="0">
+              <a:buNone/>
+            </a:pPr>
+            <a:r>
+              <a:rPr lang="en-US" sz="1150" b="1" dirty="0">
+                <a:solidFill>
+                  <a:srgbClr val="CADCFC"/>
+                </a:solidFill>
+                <a:latin typeface="Calibri" pitchFamily="34" charset="0"/>
+                <a:ea typeface="Calibri" pitchFamily="34" charset="-122"/>
+                <a:cs typeface="Calibri" pitchFamily="34" charset="-120"/>
+              </a:rPr>
+              <a:t>Dividends</a:t>
+            </a:r>
+            <a:endParaRPr lang="en-US" sz="1150" dirty="0"/>
+          </a:p>
+        </p:txBody>
+      </p:sp>
+      <p:sp>
+        <p:nvSpPr>
+          <p:cNvPr id="32" name="Shape 24"/>
+          <p:cNvSpPr/>
+          <p:nvPr/>
+        </p:nvSpPr>
+        <p:spPr>
+          <a:xfrm>
+            <a:off x="4361688" y="5554980"/>
+            <a:ext cx="274320" cy="274320"/>
+          </a:xfrm>
+          <a:prstGeom prst="ellipse">
+            <a:avLst/>
+          </a:prstGeom>
+          <a:solidFill>
+            <a:srgbClr val="3A4694"/>
+          </a:solidFill>
+          <a:ln/>
+        </p:spPr>
+      </p:sp>
+      <p:pic>
+        <p:nvPicPr>
+          <p:cNvPr id="33" name="Image 6" descr="preencoded.png">    </p:cNvPr>
+          <p:cNvPicPr>
+            <a:picLocks noChangeAspect="1"/>
+          </p:cNvPicPr>
+          <p:nvPr/>
+        </p:nvPicPr>
+        <p:blipFill>
+          <a:blip r:embed="rId7"/>
+          <a:stretch>
+            <a:fillRect/>
+          </a:stretch>
+        </p:blipFill>
+        <p:spPr>
+          <a:xfrm>
+            <a:off x="4433011" y="5626303"/>
+            <a:ext cx="131674" cy="131674"/>
+          </a:xfrm>
+          <a:prstGeom prst="rect">
+            <a:avLst/>
+          </a:prstGeom>
+        </p:spPr>
+      </p:pic>
+      <p:sp>
+        <p:nvSpPr>
+          <p:cNvPr id="34" name="Text 25"/>
+          <p:cNvSpPr txBox="1"/>
+          <p:nvPr/>
+        </p:nvSpPr>
+        <p:spPr>
+          <a:xfrm>
+            <a:off x="4764024" y="5522976"/>
+            <a:ext cx="1408176" cy="338328"/>
+          </a:xfrm>
+          <a:prstGeom prst="rect">
+            <a:avLst/>
+          </a:prstGeom>
+          <a:noFill/>
+          <a:ln/>
+        </p:spPr>
+        <p:txBody>
+          <a:bodyPr wrap="square" lIns="0" tIns="0" rIns="0" bIns="0" rtlCol="0" anchor="ctr"/>
+          <a:lstStyle/>
+          <a:p>
+            <a:pPr algn="l" indent="0" marL="0">
+              <a:buNone/>
+            </a:pPr>
+            <a:r>
+              <a:rPr lang="en-US" sz="1150" b="1" dirty="0">
+                <a:solidFill>
+                  <a:srgbClr val="CADCFC"/>
+                </a:solidFill>
+                <a:latin typeface="Calibri" pitchFamily="34" charset="0"/>
+                <a:ea typeface="Calibri" pitchFamily="34" charset="-122"/>
+                <a:cs typeface="Calibri" pitchFamily="34" charset="-120"/>
+              </a:rPr>
+              <a:t>Holdings</a:t>
+            </a:r>
+            <a:endParaRPr lang="en-US" sz="1150" dirty="0"/>
+          </a:p>
+        </p:txBody>
+      </p:sp>
+      <p:sp>
+        <p:nvSpPr>
+          <p:cNvPr id="35" name="Shape 26"/>
           <p:cNvSpPr/>
           <p:nvPr/>
         </p:nvSpPr>
@@ -1832,7 +2251,7 @@
             <a:avLst/>
           </a:prstGeom>
           <a:noFill/>
-          <a:ln w="19050">
+          <a:ln w="22225">
             <a:solidFill>
               <a:srgbClr val="1E2761"/>
             </a:solidFill>
@@ -1844,7 +2263,7 @@
       </p:sp>
       <p:sp>
         <p:nvSpPr>
-          <p:cNvPr id="18" name="Shape 15"/>
+          <p:cNvPr id="36" name="Shape 27"/>
           <p:cNvSpPr/>
           <p:nvPr/>
         </p:nvSpPr>
@@ -1857,7 +2276,7 @@
             <a:avLst/>
           </a:prstGeom>
           <a:noFill/>
-          <a:ln w="19050">
+          <a:ln w="22225">
             <a:solidFill>
               <a:srgbClr val="1E2761"/>
             </a:solidFill>
@@ -1869,7 +2288,7 @@
       </p:sp>
       <p:sp>
         <p:nvSpPr>
-          <p:cNvPr id="19" name="Shape 16"/>
+          <p:cNvPr id="37" name="Shape 28"/>
           <p:cNvSpPr/>
           <p:nvPr/>
         </p:nvSpPr>
@@ -1882,7 +2301,7 @@
             <a:avLst/>
           </a:prstGeom>
           <a:noFill/>
-          <a:ln w="19050">
+          <a:ln w="22225">
             <a:solidFill>
               <a:srgbClr val="1E2761"/>
             </a:solidFill>
@@ -1894,7 +2313,7 @@
       </p:sp>
       <p:sp>
         <p:nvSpPr>
-          <p:cNvPr id="20" name="Shape 17"/>
+          <p:cNvPr id="38" name="Shape 29"/>
           <p:cNvSpPr/>
           <p:nvPr/>
         </p:nvSpPr>
@@ -1907,7 +2326,7 @@
             <a:avLst/>
           </a:prstGeom>
           <a:noFill/>
-          <a:ln w="19050">
+          <a:ln w="22225">
             <a:solidFill>
               <a:srgbClr val="1E2761"/>
             </a:solidFill>
@@ -1919,7 +2338,7 @@
       </p:sp>
       <p:sp>
         <p:nvSpPr>
-          <p:cNvPr id="21" name="Shape 18"/>
+          <p:cNvPr id="39" name="Shape 30"/>
           <p:cNvSpPr/>
           <p:nvPr/>
         </p:nvSpPr>
@@ -1932,7 +2351,7 @@
             <a:avLst/>
           </a:prstGeom>
           <a:noFill/>
-          <a:ln w="19050">
+          <a:ln w="22225">
             <a:solidFill>
               <a:srgbClr val="1E2761"/>
             </a:solidFill>
@@ -1944,7 +2363,7 @@
       </p:sp>
       <p:sp>
         <p:nvSpPr>
-          <p:cNvPr id="22" name="Shape 19"/>
+          <p:cNvPr id="40" name="Shape 31"/>
           <p:cNvSpPr/>
           <p:nvPr/>
         </p:nvSpPr>
@@ -1957,7 +2376,7 @@
             <a:avLst/>
           </a:prstGeom>
           <a:noFill/>
-          <a:ln w="19050">
+          <a:ln w="22225">
             <a:solidFill>
               <a:srgbClr val="C89B3C"/>
             </a:solidFill>
@@ -1968,7 +2387,7 @@
       </p:sp>
       <p:sp>
         <p:nvSpPr>
-          <p:cNvPr id="23" name="Shape 20"/>
+          <p:cNvPr id="41" name="Shape 32"/>
           <p:cNvSpPr/>
           <p:nvPr/>
         </p:nvSpPr>
@@ -1981,7 +2400,7 @@
             <a:avLst/>
           </a:prstGeom>
           <a:noFill/>
-          <a:ln w="19050">
+          <a:ln w="22225">
             <a:solidFill>
               <a:srgbClr val="1E2761"/>
             </a:solidFill>
@@ -1993,7 +2412,7 @@
       </p:sp>
       <p:sp>
         <p:nvSpPr>
-          <p:cNvPr id="24" name="Shape 21"/>
+          <p:cNvPr id="42" name="Shape 33"/>
           <p:cNvSpPr/>
           <p:nvPr/>
         </p:nvSpPr>
@@ -2006,7 +2425,7 @@
             <a:avLst/>
           </a:prstGeom>
           <a:noFill/>
-          <a:ln w="19050">
+          <a:ln w="22225">
             <a:solidFill>
               <a:srgbClr val="1E2761"/>
             </a:solidFill>
@@ -2018,7 +2437,7 @@
       </p:sp>
       <p:sp>
         <p:nvSpPr>
-          <p:cNvPr id="25" name="Shape 22"/>
+          <p:cNvPr id="43" name="Shape 34"/>
           <p:cNvSpPr/>
           <p:nvPr/>
         </p:nvSpPr>
@@ -2031,7 +2450,7 @@
             <a:avLst/>
           </a:prstGeom>
           <a:noFill/>
-          <a:ln w="19050">
+          <a:ln w="22225">
             <a:solidFill>
               <a:srgbClr val="C89B3C"/>
             </a:solidFill>
@@ -2042,7 +2461,7 @@
       </p:sp>
       <p:sp>
         <p:nvSpPr>
-          <p:cNvPr id="26" name="Shape 23"/>
+          <p:cNvPr id="44" name="Shape 35"/>
           <p:cNvSpPr/>
           <p:nvPr/>
         </p:nvSpPr>
@@ -2055,7 +2474,7 @@
             <a:avLst/>
           </a:prstGeom>
           <a:noFill/>
-          <a:ln w="19050">
+          <a:ln w="22225">
             <a:solidFill>
               <a:srgbClr val="C89B3C"/>
             </a:solidFill>
@@ -2066,7 +2485,7 @@
       </p:sp>
       <p:sp>
         <p:nvSpPr>
-          <p:cNvPr id="27" name="Shape 24"/>
+          <p:cNvPr id="45" name="Shape 36"/>
           <p:cNvSpPr/>
           <p:nvPr/>
         </p:nvSpPr>
@@ -2079,7 +2498,7 @@
             <a:avLst/>
           </a:prstGeom>
           <a:noFill/>
-          <a:ln w="19050">
+          <a:ln w="22225">
             <a:solidFill>
               <a:srgbClr val="1E2761"/>
             </a:solidFill>
@@ -2091,7 +2510,7 @@
       </p:sp>
       <p:sp>
         <p:nvSpPr>
-          <p:cNvPr id="28" name="Shape 25"/>
+          <p:cNvPr id="46" name="Shape 37"/>
           <p:cNvSpPr/>
           <p:nvPr/>
         </p:nvSpPr>
@@ -2104,7 +2523,7 @@
             <a:avLst/>
           </a:prstGeom>
           <a:noFill/>
-          <a:ln w="19050">
+          <a:ln w="22225">
             <a:solidFill>
               <a:srgbClr val="C89B3C"/>
             </a:solidFill>
@@ -2115,7 +2534,7 @@
       </p:sp>
       <p:sp>
         <p:nvSpPr>
-          <p:cNvPr id="29" name="Shape 26"/>
+          <p:cNvPr id="47" name="Shape 38"/>
           <p:cNvSpPr/>
           <p:nvPr/>
         </p:nvSpPr>
@@ -2128,7 +2547,7 @@
             <a:avLst/>
           </a:prstGeom>
           <a:noFill/>
-          <a:ln w="19050">
+          <a:ln w="22225">
             <a:solidFill>
               <a:srgbClr val="C89B3C"/>
             </a:solidFill>
@@ -2139,7 +2558,7 @@
       </p:sp>
       <p:sp>
         <p:nvSpPr>
-          <p:cNvPr id="30" name="Shape 27"/>
+          <p:cNvPr id="48" name="Shape 39"/>
           <p:cNvSpPr/>
           <p:nvPr/>
         </p:nvSpPr>
@@ -2150,7 +2569,7 @@
           </a:xfrm>
           <a:prstGeom prst="roundRect">
             <a:avLst>
-              <a:gd name="adj" fmla="val 8235"/>
+              <a:gd name="adj" fmla="val 9412"/>
             </a:avLst>
           </a:prstGeom>
           <a:solidFill>
@@ -2162,11 +2581,18 @@
             </a:solidFill>
             <a:prstDash val="solid"/>
           </a:ln>
-        </p:spPr>
-      </p:sp>
-      <p:sp>
-        <p:nvSpPr>
-          <p:cNvPr id="31" name="Shape 28"/>
+          <a:effectLst>
+            <a:outerShdw sx="100000" sy="100000" kx="0" ky="0" algn="bl" rotWithShape="0" blurRad="63500" dist="25400" dir="5400000">
+              <a:srgbClr val="9AA7C7">
+                <a:alpha val="32000"/>
+              </a:srgbClr>
+            </a:outerShdw>
+          </a:effectLst>
+        </p:spPr>
+      </p:sp>
+      <p:sp>
+        <p:nvSpPr>
+          <p:cNvPr id="49" name="Shape 40"/>
           <p:cNvSpPr/>
           <p:nvPr/>
         </p:nvSpPr>
@@ -2186,14 +2612,14 @@
       </p:sp>
       <p:pic>
         <p:nvPicPr>
-          <p:cNvPr id="32" name="Image 1" descr="preencoded.png">    </p:cNvPr>
+          <p:cNvPr id="50" name="Image 7" descr="preencoded.png">    </p:cNvPr>
           <p:cNvPicPr>
             <a:picLocks noChangeAspect="1"/>
           </p:cNvPicPr>
           <p:nvPr/>
         </p:nvPicPr>
         <p:blipFill>
-          <a:blip r:embed="rId2"/>
+          <a:blip r:embed="rId8"/>
           <a:stretch>
             <a:fillRect/>
           </a:stretch>
@@ -2210,7 +2636,7 @@
       </p:pic>
       <p:sp>
         <p:nvSpPr>
-          <p:cNvPr id="33" name="Text 29"/>
+          <p:cNvPr id="51" name="Text 41"/>
           <p:cNvSpPr txBox="1"/>
           <p:nvPr/>
         </p:nvSpPr>
@@ -2272,7 +2698,7 @@
       </p:sp>
       <p:sp>
         <p:nvSpPr>
-          <p:cNvPr id="34" name="Shape 30"/>
+          <p:cNvPr id="52" name="Shape 42"/>
           <p:cNvSpPr/>
           <p:nvPr/>
         </p:nvSpPr>
@@ -2283,7 +2709,7 @@
           </a:xfrm>
           <a:prstGeom prst="roundRect">
             <a:avLst>
-              <a:gd name="adj" fmla="val 8235"/>
+              <a:gd name="adj" fmla="val 9412"/>
             </a:avLst>
           </a:prstGeom>
           <a:solidFill>
@@ -2295,11 +2721,18 @@
             </a:solidFill>
             <a:prstDash val="solid"/>
           </a:ln>
-        </p:spPr>
-      </p:sp>
-      <p:sp>
-        <p:nvSpPr>
-          <p:cNvPr id="35" name="Shape 31"/>
+          <a:effectLst>
+            <a:outerShdw sx="100000" sy="100000" kx="0" ky="0" algn="bl" rotWithShape="0" blurRad="63500" dist="25400" dir="5400000">
+              <a:srgbClr val="9AA7C7">
+                <a:alpha val="32000"/>
+              </a:srgbClr>
+            </a:outerShdw>
+          </a:effectLst>
+        </p:spPr>
+      </p:sp>
+      <p:sp>
+        <p:nvSpPr>
+          <p:cNvPr id="53" name="Shape 43"/>
           <p:cNvSpPr/>
           <p:nvPr/>
         </p:nvSpPr>
@@ -2319,14 +2752,14 @@
       </p:sp>
       <p:pic>
         <p:nvPicPr>
-          <p:cNvPr id="36" name="Image 2" descr="preencoded.png">    </p:cNvPr>
+          <p:cNvPr id="54" name="Image 8" descr="preencoded.png">    </p:cNvPr>
           <p:cNvPicPr>
             <a:picLocks noChangeAspect="1"/>
           </p:cNvPicPr>
           <p:nvPr/>
         </p:nvPicPr>
         <p:blipFill>
-          <a:blip r:embed="rId3"/>
+          <a:blip r:embed="rId9"/>
           <a:stretch>
             <a:fillRect/>
           </a:stretch>
@@ -2343,7 +2776,7 @@
       </p:pic>
       <p:sp>
         <p:nvSpPr>
-          <p:cNvPr id="37" name="Text 32"/>
+          <p:cNvPr id="55" name="Text 44"/>
           <p:cNvSpPr txBox="1"/>
           <p:nvPr/>
         </p:nvSpPr>
@@ -2405,7 +2838,7 @@
       </p:sp>
       <p:sp>
         <p:nvSpPr>
-          <p:cNvPr id="38" name="Shape 33"/>
+          <p:cNvPr id="56" name="Shape 45"/>
           <p:cNvSpPr/>
           <p:nvPr/>
         </p:nvSpPr>
@@ -2416,7 +2849,7 @@
           </a:xfrm>
           <a:prstGeom prst="roundRect">
             <a:avLst>
-              <a:gd name="adj" fmla="val 8235"/>
+              <a:gd name="adj" fmla="val 9412"/>
             </a:avLst>
           </a:prstGeom>
           <a:solidFill>
@@ -2428,11 +2861,18 @@
             </a:solidFill>
             <a:prstDash val="solid"/>
           </a:ln>
-        </p:spPr>
-      </p:sp>
-      <p:sp>
-        <p:nvSpPr>
-          <p:cNvPr id="39" name="Shape 34"/>
+          <a:effectLst>
+            <a:outerShdw sx="100000" sy="100000" kx="0" ky="0" algn="bl" rotWithShape="0" blurRad="63500" dist="25400" dir="5400000">
+              <a:srgbClr val="9AA7C7">
+                <a:alpha val="32000"/>
+              </a:srgbClr>
+            </a:outerShdw>
+          </a:effectLst>
+        </p:spPr>
+      </p:sp>
+      <p:sp>
+        <p:nvSpPr>
+          <p:cNvPr id="57" name="Shape 46"/>
           <p:cNvSpPr/>
           <p:nvPr/>
         </p:nvSpPr>
@@ -2452,14 +2892,14 @@
       </p:sp>
       <p:pic>
         <p:nvPicPr>
-          <p:cNvPr id="40" name="Image 3" descr="preencoded.png">    </p:cNvPr>
+          <p:cNvPr id="58" name="Image 9" descr="preencoded.png">    </p:cNvPr>
           <p:cNvPicPr>
             <a:picLocks noChangeAspect="1"/>
           </p:cNvPicPr>
           <p:nvPr/>
         </p:nvPicPr>
         <p:blipFill>
-          <a:blip r:embed="rId4"/>
+          <a:blip r:embed="rId10"/>
           <a:stretch>
             <a:fillRect/>
           </a:stretch>
@@ -2476,7 +2916,7 @@
       </p:pic>
       <p:sp>
         <p:nvSpPr>
-          <p:cNvPr id="41" name="Text 35"/>
+          <p:cNvPr id="59" name="Text 47"/>
           <p:cNvSpPr txBox="1"/>
           <p:nvPr/>
         </p:nvSpPr>
@@ -2538,7 +2978,7 @@
       </p:sp>
       <p:sp>
         <p:nvSpPr>
-          <p:cNvPr id="42" name="Shape 36"/>
+          <p:cNvPr id="60" name="Shape 48"/>
           <p:cNvSpPr/>
           <p:nvPr/>
         </p:nvSpPr>
@@ -2549,7 +2989,7 @@
           </a:xfrm>
           <a:prstGeom prst="roundRect">
             <a:avLst>
-              <a:gd name="adj" fmla="val 8235"/>
+              <a:gd name="adj" fmla="val 9412"/>
             </a:avLst>
           </a:prstGeom>
           <a:solidFill>
@@ -2561,11 +3001,18 @@
             </a:solidFill>
             <a:prstDash val="solid"/>
           </a:ln>
-        </p:spPr>
-      </p:sp>
-      <p:sp>
-        <p:nvSpPr>
-          <p:cNvPr id="43" name="Shape 37"/>
+          <a:effectLst>
+            <a:outerShdw sx="100000" sy="100000" kx="0" ky="0" algn="bl" rotWithShape="0" blurRad="63500" dist="25400" dir="5400000">
+              <a:srgbClr val="9AA7C7">
+                <a:alpha val="32000"/>
+              </a:srgbClr>
+            </a:outerShdw>
+          </a:effectLst>
+        </p:spPr>
+      </p:sp>
+      <p:sp>
+        <p:nvSpPr>
+          <p:cNvPr id="61" name="Shape 49"/>
           <p:cNvSpPr/>
           <p:nvPr/>
         </p:nvSpPr>
@@ -2585,14 +3032,14 @@
       </p:sp>
       <p:pic>
         <p:nvPicPr>
-          <p:cNvPr id="44" name="Image 4" descr="preencoded.png">    </p:cNvPr>
+          <p:cNvPr id="62" name="Image 10" descr="preencoded.png">    </p:cNvPr>
           <p:cNvPicPr>
             <a:picLocks noChangeAspect="1"/>
           </p:cNvPicPr>
           <p:nvPr/>
         </p:nvPicPr>
         <p:blipFill>
-          <a:blip r:embed="rId5"/>
+          <a:blip r:embed="rId11"/>
           <a:stretch>
             <a:fillRect/>
           </a:stretch>
@@ -2609,7 +3056,7 @@
       </p:pic>
       <p:sp>
         <p:nvSpPr>
-          <p:cNvPr id="45" name="Text 38"/>
+          <p:cNvPr id="63" name="Text 50"/>
           <p:cNvSpPr txBox="1"/>
           <p:nvPr/>
         </p:nvSpPr>
@@ -2671,7 +3118,7 @@
       </p:sp>
       <p:sp>
         <p:nvSpPr>
-          <p:cNvPr id="46" name="Shape 39"/>
+          <p:cNvPr id="64" name="Shape 51"/>
           <p:cNvSpPr/>
           <p:nvPr/>
         </p:nvSpPr>
@@ -2682,7 +3129,7 @@
           </a:xfrm>
           <a:prstGeom prst="roundRect">
             <a:avLst>
-              <a:gd name="adj" fmla="val 14000"/>
+              <a:gd name="adj" fmla="val 16000"/>
             </a:avLst>
           </a:prstGeom>
           <a:solidFill>
@@ -2694,11 +3141,18 @@
             </a:solidFill>
             <a:prstDash val="solid"/>
           </a:ln>
-        </p:spPr>
-      </p:sp>
-      <p:sp>
-        <p:nvSpPr>
-          <p:cNvPr id="47" name="Shape 40"/>
+          <a:effectLst>
+            <a:outerShdw sx="100000" sy="100000" kx="0" ky="0" algn="bl" rotWithShape="0" blurRad="63500" dist="25400" dir="5400000">
+              <a:srgbClr val="9AA7C7">
+                <a:alpha val="32000"/>
+              </a:srgbClr>
+            </a:outerShdw>
+          </a:effectLst>
+        </p:spPr>
+      </p:sp>
+      <p:sp>
+        <p:nvSpPr>
+          <p:cNvPr id="65" name="Shape 52"/>
           <p:cNvSpPr/>
           <p:nvPr/>
         </p:nvSpPr>
@@ -2718,14 +3172,14 @@
       </p:sp>
       <p:pic>
         <p:nvPicPr>
-          <p:cNvPr id="48" name="Image 5" descr="preencoded.png">    </p:cNvPr>
+          <p:cNvPr id="66" name="Image 11" descr="preencoded.png">    </p:cNvPr>
           <p:cNvPicPr>
             <a:picLocks noChangeAspect="1"/>
           </p:cNvPicPr>
           <p:nvPr/>
         </p:nvPicPr>
         <p:blipFill>
-          <a:blip r:embed="rId6"/>
+          <a:blip r:embed="rId12"/>
           <a:stretch>
             <a:fillRect/>
           </a:stretch>
@@ -2742,7 +3196,7 @@
       </p:pic>
       <p:sp>
         <p:nvSpPr>
-          <p:cNvPr id="49" name="Text 41"/>
+          <p:cNvPr id="67" name="Text 53"/>
           <p:cNvSpPr txBox="1"/>
           <p:nvPr/>
         </p:nvSpPr>
@@ -2784,7 +3238,7 @@
       </p:sp>
       <p:sp>
         <p:nvSpPr>
-          <p:cNvPr id="50" name="Shape 42"/>
+          <p:cNvPr id="68" name="Shape 54"/>
           <p:cNvSpPr/>
           <p:nvPr/>
         </p:nvSpPr>
@@ -2795,7 +3249,7 @@
           </a:xfrm>
           <a:prstGeom prst="roundRect">
             <a:avLst>
-              <a:gd name="adj" fmla="val 14000"/>
+              <a:gd name="adj" fmla="val 16000"/>
             </a:avLst>
           </a:prstGeom>
           <a:solidFill>
@@ -2807,11 +3261,18 @@
             </a:solidFill>
             <a:prstDash val="solid"/>
           </a:ln>
-        </p:spPr>
-      </p:sp>
-      <p:sp>
-        <p:nvSpPr>
-          <p:cNvPr id="51" name="Shape 43"/>
+          <a:effectLst>
+            <a:outerShdw sx="100000" sy="100000" kx="0" ky="0" algn="bl" rotWithShape="0" blurRad="63500" dist="25400" dir="5400000">
+              <a:srgbClr val="9AA7C7">
+                <a:alpha val="32000"/>
+              </a:srgbClr>
+            </a:outerShdw>
+          </a:effectLst>
+        </p:spPr>
+      </p:sp>
+      <p:sp>
+        <p:nvSpPr>
+          <p:cNvPr id="69" name="Shape 55"/>
           <p:cNvSpPr/>
           <p:nvPr/>
         </p:nvSpPr>
@@ -2831,14 +3292,14 @@
       </p:sp>
       <p:pic>
         <p:nvPicPr>
-          <p:cNvPr id="52" name="Image 6" descr="preencoded.png">    </p:cNvPr>
+          <p:cNvPr id="70" name="Image 12" descr="preencoded.png">    </p:cNvPr>
           <p:cNvPicPr>
             <a:picLocks noChangeAspect="1"/>
           </p:cNvPicPr>
           <p:nvPr/>
         </p:nvPicPr>
         <p:blipFill>
-          <a:blip r:embed="rId7"/>
+          <a:blip r:embed="rId13"/>
           <a:stretch>
             <a:fillRect/>
           </a:stretch>
@@ -2855,7 +3316,7 @@
       </p:pic>
       <p:sp>
         <p:nvSpPr>
-          <p:cNvPr id="53" name="Text 44"/>
+          <p:cNvPr id="71" name="Text 56"/>
           <p:cNvSpPr txBox="1"/>
           <p:nvPr/>
         </p:nvSpPr>
@@ -2917,7 +3378,7 @@
       </p:sp>
       <p:sp>
         <p:nvSpPr>
-          <p:cNvPr id="54" name="Shape 45"/>
+          <p:cNvPr id="72" name="Shape 57"/>
           <p:cNvSpPr/>
           <p:nvPr/>
         </p:nvSpPr>
@@ -2928,7 +3389,7 @@
           </a:xfrm>
           <a:prstGeom prst="roundRect">
             <a:avLst>
-              <a:gd name="adj" fmla="val 14000"/>
+              <a:gd name="adj" fmla="val 16000"/>
             </a:avLst>
           </a:prstGeom>
           <a:solidFill>
@@ -2940,11 +3401,18 @@
             </a:solidFill>
             <a:prstDash val="solid"/>
           </a:ln>
-        </p:spPr>
-      </p:sp>
-      <p:sp>
-        <p:nvSpPr>
-          <p:cNvPr id="55" name="Shape 46"/>
+          <a:effectLst>
+            <a:outerShdw sx="100000" sy="100000" kx="0" ky="0" algn="bl" rotWithShape="0" blurRad="63500" dist="25400" dir="5400000">
+              <a:srgbClr val="9AA7C7">
+                <a:alpha val="32000"/>
+              </a:srgbClr>
+            </a:outerShdw>
+          </a:effectLst>
+        </p:spPr>
+      </p:sp>
+      <p:sp>
+        <p:nvSpPr>
+          <p:cNvPr id="73" name="Shape 58"/>
           <p:cNvSpPr/>
           <p:nvPr/>
         </p:nvSpPr>
@@ -2964,14 +3432,14 @@
       </p:sp>
       <p:pic>
         <p:nvPicPr>
-          <p:cNvPr id="56" name="Image 7" descr="preencoded.png">    </p:cNvPr>
+          <p:cNvPr id="74" name="Image 13" descr="preencoded.png">    </p:cNvPr>
           <p:cNvPicPr>
             <a:picLocks noChangeAspect="1"/>
           </p:cNvPicPr>
           <p:nvPr/>
         </p:nvPicPr>
         <p:blipFill>
-          <a:blip r:embed="rId8"/>
+          <a:blip r:embed="rId14"/>
           <a:stretch>
             <a:fillRect/>
           </a:stretch>
@@ -2988,7 +3456,7 @@
       </p:pic>
       <p:sp>
         <p:nvSpPr>
-          <p:cNvPr id="57" name="Text 47"/>
+          <p:cNvPr id="75" name="Text 59"/>
           <p:cNvSpPr txBox="1"/>
           <p:nvPr/>
         </p:nvSpPr>
@@ -3030,7 +3498,7 @@
       </p:sp>
       <p:sp>
         <p:nvSpPr>
-          <p:cNvPr id="58" name="Shape 48"/>
+          <p:cNvPr id="76" name="Shape 60"/>
           <p:cNvSpPr/>
           <p:nvPr/>
         </p:nvSpPr>
@@ -3041,7 +3509,7 @@
           </a:xfrm>
           <a:prstGeom prst="roundRect">
             <a:avLst>
-              <a:gd name="adj" fmla="val 14000"/>
+              <a:gd name="adj" fmla="val 16000"/>
             </a:avLst>
           </a:prstGeom>
           <a:solidFill>
@@ -3053,11 +3521,18 @@
             </a:solidFill>
             <a:prstDash val="solid"/>
           </a:ln>
-        </p:spPr>
-      </p:sp>
-      <p:sp>
-        <p:nvSpPr>
-          <p:cNvPr id="59" name="Shape 49"/>
+          <a:effectLst>
+            <a:outerShdw sx="100000" sy="100000" kx="0" ky="0" algn="bl" rotWithShape="0" blurRad="63500" dist="25400" dir="5400000">
+              <a:srgbClr val="9AA7C7">
+                <a:alpha val="32000"/>
+              </a:srgbClr>
+            </a:outerShdw>
+          </a:effectLst>
+        </p:spPr>
+      </p:sp>
+      <p:sp>
+        <p:nvSpPr>
+          <p:cNvPr id="77" name="Shape 61"/>
           <p:cNvSpPr/>
           <p:nvPr/>
         </p:nvSpPr>
@@ -3077,14 +3552,14 @@
       </p:sp>
       <p:pic>
         <p:nvPicPr>
-          <p:cNvPr id="60" name="Image 8" descr="preencoded.png">    </p:cNvPr>
+          <p:cNvPr id="78" name="Image 14" descr="preencoded.png">    </p:cNvPr>
           <p:cNvPicPr>
             <a:picLocks noChangeAspect="1"/>
           </p:cNvPicPr>
           <p:nvPr/>
         </p:nvPicPr>
         <p:blipFill>
-          <a:blip r:embed="rId9"/>
+          <a:blip r:embed="rId15"/>
           <a:stretch>
             <a:fillRect/>
           </a:stretch>
@@ -3101,7 +3576,7 @@
       </p:pic>
       <p:sp>
         <p:nvSpPr>
-          <p:cNvPr id="61" name="Text 50"/>
+          <p:cNvPr id="79" name="Text 62"/>
           <p:cNvSpPr txBox="1"/>
           <p:nvPr/>
         </p:nvSpPr>
@@ -3143,7 +3618,7 @@
       </p:sp>
       <p:sp>
         <p:nvSpPr>
-          <p:cNvPr id="62" name="Shape 51"/>
+          <p:cNvPr id="80" name="Shape 63"/>
           <p:cNvSpPr/>
           <p:nvPr/>
         </p:nvSpPr>
@@ -3154,7 +3629,7 @@
           </a:xfrm>
           <a:prstGeom prst="roundRect">
             <a:avLst>
-              <a:gd name="adj" fmla="val 14000"/>
+              <a:gd name="adj" fmla="val 16000"/>
             </a:avLst>
           </a:prstGeom>
           <a:solidFill>
@@ -3166,11 +3641,18 @@
             </a:solidFill>
             <a:prstDash val="solid"/>
           </a:ln>
-        </p:spPr>
-      </p:sp>
-      <p:sp>
-        <p:nvSpPr>
-          <p:cNvPr id="63" name="Shape 52"/>
+          <a:effectLst>
+            <a:outerShdw sx="100000" sy="100000" kx="0" ky="0" algn="bl" rotWithShape="0" blurRad="63500" dist="25400" dir="5400000">
+              <a:srgbClr val="9AA7C7">
+                <a:alpha val="32000"/>
+              </a:srgbClr>
+            </a:outerShdw>
+          </a:effectLst>
+        </p:spPr>
+      </p:sp>
+      <p:sp>
+        <p:nvSpPr>
+          <p:cNvPr id="81" name="Shape 64"/>
           <p:cNvSpPr/>
           <p:nvPr/>
         </p:nvSpPr>
@@ -3190,14 +3672,14 @@
       </p:sp>
       <p:pic>
         <p:nvPicPr>
-          <p:cNvPr id="64" name="Image 9" descr="preencoded.png">    </p:cNvPr>
+          <p:cNvPr id="82" name="Image 15" descr="preencoded.png">    </p:cNvPr>
           <p:cNvPicPr>
             <a:picLocks noChangeAspect="1"/>
           </p:cNvPicPr>
           <p:nvPr/>
         </p:nvPicPr>
         <p:blipFill>
-          <a:blip r:embed="rId10"/>
+          <a:blip r:embed="rId16"/>
           <a:stretch>
             <a:fillRect/>
           </a:stretch>
@@ -3214,7 +3696,7 @@
       </p:pic>
       <p:sp>
         <p:nvSpPr>
-          <p:cNvPr id="65" name="Text 53"/>
+          <p:cNvPr id="83" name="Text 65"/>
           <p:cNvSpPr txBox="1"/>
           <p:nvPr/>
         </p:nvSpPr>
@@ -3256,7 +3738,7 @@
       </p:sp>
       <p:sp>
         <p:nvSpPr>
-          <p:cNvPr id="66" name="Shape 54"/>
+          <p:cNvPr id="84" name="Shape 66"/>
           <p:cNvSpPr/>
           <p:nvPr/>
         </p:nvSpPr>
@@ -3267,7 +3749,7 @@
           </a:xfrm>
           <a:prstGeom prst="roundRect">
             <a:avLst>
-              <a:gd name="adj" fmla="val 14000"/>
+              <a:gd name="adj" fmla="val 16000"/>
             </a:avLst>
           </a:prstGeom>
           <a:solidFill>
@@ -3279,11 +3761,18 @@
             </a:solidFill>
             <a:prstDash val="solid"/>
           </a:ln>
-        </p:spPr>
-      </p:sp>
-      <p:sp>
-        <p:nvSpPr>
-          <p:cNvPr id="67" name="Shape 55"/>
+          <a:effectLst>
+            <a:outerShdw sx="100000" sy="100000" kx="0" ky="0" algn="bl" rotWithShape="0" blurRad="63500" dist="25400" dir="5400000">
+              <a:srgbClr val="9AA7C7">
+                <a:alpha val="32000"/>
+              </a:srgbClr>
+            </a:outerShdw>
+          </a:effectLst>
+        </p:spPr>
+      </p:sp>
+      <p:sp>
+        <p:nvSpPr>
+          <p:cNvPr id="85" name="Shape 67"/>
           <p:cNvSpPr/>
           <p:nvPr/>
         </p:nvSpPr>
@@ -3303,14 +3792,14 @@
       </p:sp>
       <p:pic>
         <p:nvPicPr>
-          <p:cNvPr id="68" name="Image 10" descr="preencoded.png">    </p:cNvPr>
+          <p:cNvPr id="86" name="Image 16" descr="preencoded.png">    </p:cNvPr>
           <p:cNvPicPr>
             <a:picLocks noChangeAspect="1"/>
           </p:cNvPicPr>
           <p:nvPr/>
         </p:nvPicPr>
         <p:blipFill>
-          <a:blip r:embed="rId11"/>
+          <a:blip r:embed="rId17"/>
           <a:stretch>
             <a:fillRect/>
           </a:stretch>
@@ -3327,7 +3816,7 @@
       </p:pic>
       <p:sp>
         <p:nvSpPr>
-          <p:cNvPr id="69" name="Text 56"/>
+          <p:cNvPr id="87" name="Text 68"/>
           <p:cNvSpPr txBox="1"/>
           <p:nvPr/>
         </p:nvSpPr>
@@ -3369,7 +3858,7 @@
       </p:sp>
       <p:sp>
         <p:nvSpPr>
-          <p:cNvPr id="70" name="Shape 57"/>
+          <p:cNvPr id="88" name="Shape 69"/>
           <p:cNvSpPr/>
           <p:nvPr/>
         </p:nvSpPr>
@@ -3380,7 +3869,7 @@
           </a:xfrm>
           <a:prstGeom prst="roundRect">
             <a:avLst>
-              <a:gd name="adj" fmla="val 14000"/>
+              <a:gd name="adj" fmla="val 16000"/>
             </a:avLst>
           </a:prstGeom>
           <a:solidFill>
@@ -3392,11 +3881,18 @@
             </a:solidFill>
             <a:prstDash val="solid"/>
           </a:ln>
-        </p:spPr>
-      </p:sp>
-      <p:sp>
-        <p:nvSpPr>
-          <p:cNvPr id="71" name="Shape 58"/>
+          <a:effectLst>
+            <a:outerShdw sx="100000" sy="100000" kx="0" ky="0" algn="bl" rotWithShape="0" blurRad="63500" dist="25400" dir="5400000">
+              <a:srgbClr val="9AA7C7">
+                <a:alpha val="32000"/>
+              </a:srgbClr>
+            </a:outerShdw>
+          </a:effectLst>
+        </p:spPr>
+      </p:sp>
+      <p:sp>
+        <p:nvSpPr>
+          <p:cNvPr id="89" name="Shape 70"/>
           <p:cNvSpPr/>
           <p:nvPr/>
         </p:nvSpPr>
@@ -3416,14 +3912,14 @@
       </p:sp>
       <p:pic>
         <p:nvPicPr>
-          <p:cNvPr id="72" name="Image 11" descr="preencoded.png">    </p:cNvPr>
+          <p:cNvPr id="90" name="Image 17" descr="preencoded.png">    </p:cNvPr>
           <p:cNvPicPr>
             <a:picLocks noChangeAspect="1"/>
           </p:cNvPicPr>
           <p:nvPr/>
         </p:nvPicPr>
         <p:blipFill>
-          <a:blip r:embed="rId12"/>
+          <a:blip r:embed="rId18"/>
           <a:stretch>
             <a:fillRect/>
           </a:stretch>
@@ -3440,7 +3936,7 @@
       </p:pic>
       <p:sp>
         <p:nvSpPr>
-          <p:cNvPr id="73" name="Text 59"/>
+          <p:cNvPr id="91" name="Text 71"/>
           <p:cNvSpPr txBox="1"/>
           <p:nvPr/>
         </p:nvSpPr>
@@ -3502,7 +3998,7 @@
       </p:sp>
       <p:sp>
         <p:nvSpPr>
-          <p:cNvPr id="74" name="Shape 60"/>
+          <p:cNvPr id="92" name="Shape 72"/>
           <p:cNvSpPr/>
           <p:nvPr/>
         </p:nvSpPr>
@@ -3513,7 +4009,7 @@
           </a:xfrm>
           <a:prstGeom prst="roundRect">
             <a:avLst>
-              <a:gd name="adj" fmla="val 14000"/>
+              <a:gd name="adj" fmla="val 16000"/>
             </a:avLst>
           </a:prstGeom>
           <a:solidFill>
@@ -3525,11 +4021,18 @@
             </a:solidFill>
             <a:prstDash val="solid"/>
           </a:ln>
-        </p:spPr>
-      </p:sp>
-      <p:sp>
-        <p:nvSpPr>
-          <p:cNvPr id="75" name="Shape 61"/>
+          <a:effectLst>
+            <a:outerShdw sx="100000" sy="100000" kx="0" ky="0" algn="bl" rotWithShape="0" blurRad="63500" dist="25400" dir="5400000">
+              <a:srgbClr val="9AA7C7">
+                <a:alpha val="32000"/>
+              </a:srgbClr>
+            </a:outerShdw>
+          </a:effectLst>
+        </p:spPr>
+      </p:sp>
+      <p:sp>
+        <p:nvSpPr>
+          <p:cNvPr id="93" name="Shape 73"/>
           <p:cNvSpPr/>
           <p:nvPr/>
         </p:nvSpPr>
@@ -3549,14 +4052,14 @@
       </p:sp>
       <p:pic>
         <p:nvPicPr>
-          <p:cNvPr id="76" name="Image 12" descr="preencoded.png">    </p:cNvPr>
+          <p:cNvPr id="94" name="Image 18" descr="preencoded.png">    </p:cNvPr>
           <p:cNvPicPr>
             <a:picLocks noChangeAspect="1"/>
           </p:cNvPicPr>
           <p:nvPr/>
         </p:nvPicPr>
         <p:blipFill>
-          <a:blip r:embed="rId13"/>
+          <a:blip r:embed="rId19"/>
           <a:stretch>
             <a:fillRect/>
           </a:stretch>
@@ -3573,7 +4076,7 @@
       </p:pic>
       <p:sp>
         <p:nvSpPr>
-          <p:cNvPr id="77" name="Text 62"/>
+          <p:cNvPr id="95" name="Text 74"/>
           <p:cNvSpPr txBox="1"/>
           <p:nvPr/>
         </p:nvSpPr>
@@ -3635,7 +4138,7 @@
       </p:sp>
       <p:sp>
         <p:nvSpPr>
-          <p:cNvPr id="78" name="Shape 63"/>
+          <p:cNvPr id="96" name="Shape 75"/>
           <p:cNvSpPr/>
           <p:nvPr/>
         </p:nvSpPr>
@@ -3646,7 +4149,7 @@
           </a:xfrm>
           <a:prstGeom prst="roundRect">
             <a:avLst>
-              <a:gd name="adj" fmla="val 14000"/>
+              <a:gd name="adj" fmla="val 16000"/>
             </a:avLst>
           </a:prstGeom>
           <a:solidFill>
@@ -3658,11 +4161,18 @@
             </a:solidFill>
             <a:prstDash val="solid"/>
           </a:ln>
-        </p:spPr>
-      </p:sp>
-      <p:sp>
-        <p:nvSpPr>
-          <p:cNvPr id="79" name="Shape 64"/>
+          <a:effectLst>
+            <a:outerShdw sx="100000" sy="100000" kx="0" ky="0" algn="bl" rotWithShape="0" blurRad="63500" dist="25400" dir="5400000">
+              <a:srgbClr val="9AA7C7">
+                <a:alpha val="32000"/>
+              </a:srgbClr>
+            </a:outerShdw>
+          </a:effectLst>
+        </p:spPr>
+      </p:sp>
+      <p:sp>
+        <p:nvSpPr>
+          <p:cNvPr id="97" name="Shape 76"/>
           <p:cNvSpPr/>
           <p:nvPr/>
         </p:nvSpPr>
@@ -3682,14 +4192,14 @@
       </p:sp>
       <p:pic>
         <p:nvPicPr>
-          <p:cNvPr id="80" name="Image 13" descr="preencoded.png">    </p:cNvPr>
+          <p:cNvPr id="98" name="Image 19" descr="preencoded.png">    </p:cNvPr>
           <p:cNvPicPr>
             <a:picLocks noChangeAspect="1"/>
           </p:cNvPicPr>
           <p:nvPr/>
         </p:nvPicPr>
         <p:blipFill>
-          <a:blip r:embed="rId14"/>
+          <a:blip r:embed="rId20"/>
           <a:stretch>
             <a:fillRect/>
           </a:stretch>
@@ -3706,7 +4216,7 @@
       </p:pic>
       <p:sp>
         <p:nvSpPr>
-          <p:cNvPr id="81" name="Text 65"/>
+          <p:cNvPr id="99" name="Text 77"/>
           <p:cNvSpPr txBox="1"/>
           <p:nvPr/>
         </p:nvSpPr>
@@ -3768,7 +4278,7 @@
       </p:sp>
       <p:sp>
         <p:nvSpPr>
-          <p:cNvPr id="82" name="Text 66"/>
+          <p:cNvPr id="100" name="Text 78"/>
           <p:cNvSpPr txBox="1"/>
           <p:nvPr/>
         </p:nvSpPr>
@@ -3807,7 +4317,7 @@
       </p:sp>
       <p:sp>
         <p:nvSpPr>
-          <p:cNvPr id="83" name="Text 67"/>
+          <p:cNvPr id="101" name="Text 79"/>
           <p:cNvSpPr txBox="1"/>
           <p:nvPr/>
         </p:nvSpPr>
@@ -3846,7 +4356,7 @@
       </p:sp>
       <p:sp>
         <p:nvSpPr>
-          <p:cNvPr id="84" name="Text 68"/>
+          <p:cNvPr id="102" name="Text 80"/>
           <p:cNvSpPr txBox="1"/>
           <p:nvPr/>
         </p:nvSpPr>

--- a/docs/presentations/Transfer_Agent_Data_Flow.pptx
+++ b/docs/presentations/Transfer_Agent_Data_Flow.pptx
@@ -1562,8 +1562,8 @@
         </p:nvSpPr>
         <p:spPr>
           <a:xfrm>
-            <a:off x="4960620" y="1892808"/>
-            <a:ext cx="548640" cy="548640"/>
+            <a:off x="4988052" y="1837944"/>
+            <a:ext cx="493776" cy="493776"/>
           </a:xfrm>
           <a:prstGeom prst="ellipse">
             <a:avLst/>
@@ -1590,8 +1590,8 @@
         </p:blipFill>
         <p:spPr>
           <a:xfrm>
-            <a:off x="5103266" y="2035454"/>
-            <a:ext cx="263347" cy="263347"/>
+            <a:off x="5116434" y="1966326"/>
+            <a:ext cx="237012" cy="237012"/>
           </a:xfrm>
           <a:prstGeom prst="rect">
             <a:avLst/>
@@ -1606,8 +1606,8 @@
         </p:nvSpPr>
         <p:spPr>
           <a:xfrm>
-            <a:off x="4297680" y="2532888"/>
-            <a:ext cx="1874520" cy="365760"/>
+            <a:off x="4297680" y="2368296"/>
+            <a:ext cx="1874520" cy="310896"/>
           </a:xfrm>
           <a:prstGeom prst="rect">
             <a:avLst/>
@@ -1623,7 +1623,7 @@
               <a:buNone/>
             </a:pPr>
             <a:r>
-              <a:rPr lang="en-US" sz="1600" b="1" dirty="0">
+              <a:rPr lang="en-US" sz="1450" b="1" dirty="0">
                 <a:solidFill>
                   <a:srgbClr val="FFFFFF"/>
                 </a:solidFill>
@@ -1633,7 +1633,7 @@
               </a:rPr>
               <a:t>TRANSFER AGENT</a:t>
             </a:r>
-            <a:endParaRPr lang="en-US" sz="1600" dirty="0"/>
+            <a:endParaRPr lang="en-US" sz="1450" dirty="0"/>
           </a:p>
         </p:txBody>
       </p:sp>
@@ -1645,8 +1645,8 @@
         </p:nvSpPr>
         <p:spPr>
           <a:xfrm>
-            <a:off x="4297680" y="2898648"/>
-            <a:ext cx="1874520" cy="256032"/>
+            <a:off x="4297680" y="2679192"/>
+            <a:ext cx="1874520" cy="219456"/>
           </a:xfrm>
           <a:prstGeom prst="rect">
             <a:avLst/>
@@ -1662,7 +1662,7 @@
               <a:buNone/>
             </a:pPr>
             <a:r>
-              <a:rPr lang="en-US" sz="1050" i="1" dirty="0">
+              <a:rPr lang="en-US" sz="1000" i="1" dirty="0">
                 <a:solidFill>
                   <a:srgbClr val="C89B3C"/>
                 </a:solidFill>
@@ -1672,7 +1672,7 @@
               </a:rPr>
               <a:t>Data Flow Hub</a:t>
             </a:r>
-            <a:endParaRPr lang="en-US" sz="1050" dirty="0"/>
+            <a:endParaRPr lang="en-US" sz="1000" dirty="0"/>
           </a:p>
         </p:txBody>
       </p:sp>
@@ -1684,7 +1684,7 @@
         </p:nvSpPr>
         <p:spPr>
           <a:xfrm>
-            <a:off x="4526280" y="3264408"/>
+            <a:off x="4526280" y="2990088"/>
             <a:ext cx="1417320" cy="0"/>
           </a:xfrm>
           <a:prstGeom prst="line">
@@ -1707,8 +1707,8 @@
         </p:nvSpPr>
         <p:spPr>
           <a:xfrm>
-            <a:off x="4297680" y="3337560"/>
-            <a:ext cx="1874520" cy="219456"/>
+            <a:off x="4297680" y="3044952"/>
+            <a:ext cx="1874520" cy="201168"/>
           </a:xfrm>
           <a:prstGeom prst="rect">
             <a:avLst/>
@@ -1724,7 +1724,7 @@
               <a:buNone/>
             </a:pPr>
             <a:r>
-              <a:rPr lang="en-US" sz="900" b="1" spc="150" kern="0" dirty="0">
+              <a:rPr lang="en-US" sz="850" b="1" spc="130" kern="0" dirty="0">
                 <a:solidFill>
                   <a:srgbClr val="8891B3"/>
                 </a:solidFill>
@@ -1734,7 +1734,7 @@
               </a:rPr>
               <a:t>DATA IN TRANSIT</a:t>
             </a:r>
-            <a:endParaRPr lang="en-US" sz="900" dirty="0"/>
+            <a:endParaRPr lang="en-US" sz="850" dirty="0"/>
           </a:p>
         </p:txBody>
       </p:sp>
@@ -1746,8 +1746,8 @@
         </p:nvSpPr>
         <p:spPr>
           <a:xfrm>
-            <a:off x="4361688" y="3680460"/>
-            <a:ext cx="274320" cy="274320"/>
+            <a:off x="4361688" y="3345561"/>
+            <a:ext cx="246888" cy="246888"/>
           </a:xfrm>
           <a:prstGeom prst="ellipse">
             <a:avLst/>
@@ -1774,8 +1774,8 @@
         </p:blipFill>
         <p:spPr>
           <a:xfrm>
-            <a:off x="4433011" y="3751783"/>
-            <a:ext cx="131674" cy="131674"/>
+            <a:off x="4425879" y="3409752"/>
+            <a:ext cx="118506" cy="118506"/>
           </a:xfrm>
           <a:prstGeom prst="rect">
             <a:avLst/>
@@ -1790,8 +1790,8 @@
         </p:nvSpPr>
         <p:spPr>
           <a:xfrm>
-            <a:off x="4764024" y="3648456"/>
-            <a:ext cx="1408176" cy="338328"/>
+            <a:off x="4727448" y="3319272"/>
+            <a:ext cx="1453896" cy="299466"/>
           </a:xfrm>
           <a:prstGeom prst="rect">
             <a:avLst/>
@@ -1807,7 +1807,7 @@
               <a:buNone/>
             </a:pPr>
             <a:r>
-              <a:rPr lang="en-US" sz="1150" b="1" dirty="0">
+              <a:rPr lang="en-US" sz="1050" b="1" dirty="0">
                 <a:solidFill>
                   <a:srgbClr val="CADCFC"/>
                 </a:solidFill>
@@ -1817,7 +1817,7 @@
               </a:rPr>
               <a:t>Orders</a:t>
             </a:r>
-            <a:endParaRPr lang="en-US" sz="1150" dirty="0"/>
+            <a:endParaRPr lang="en-US" sz="1050" dirty="0"/>
           </a:p>
         </p:txBody>
       </p:sp>
@@ -1829,8 +1829,8 @@
         </p:nvSpPr>
         <p:spPr>
           <a:xfrm>
-            <a:off x="4361688" y="4055364"/>
-            <a:ext cx="274320" cy="274320"/>
+            <a:off x="4361688" y="3672459"/>
+            <a:ext cx="246888" cy="246888"/>
           </a:xfrm>
           <a:prstGeom prst="ellipse">
             <a:avLst/>
@@ -1857,8 +1857,8 @@
         </p:blipFill>
         <p:spPr>
           <a:xfrm>
-            <a:off x="4433011" y="4126687"/>
-            <a:ext cx="131674" cy="131674"/>
+            <a:off x="4425879" y="3736650"/>
+            <a:ext cx="118506" cy="118506"/>
           </a:xfrm>
           <a:prstGeom prst="rect">
             <a:avLst/>
@@ -1873,8 +1873,8 @@
         </p:nvSpPr>
         <p:spPr>
           <a:xfrm>
-            <a:off x="4764024" y="4023360"/>
-            <a:ext cx="1408176" cy="338328"/>
+            <a:off x="4727448" y="3646170"/>
+            <a:ext cx="1453896" cy="299466"/>
           </a:xfrm>
           <a:prstGeom prst="rect">
             <a:avLst/>
@@ -1890,7 +1890,7 @@
               <a:buNone/>
             </a:pPr>
             <a:r>
-              <a:rPr lang="en-US" sz="1150" b="1" dirty="0">
+              <a:rPr lang="en-US" sz="1050" b="1" dirty="0">
                 <a:solidFill>
                   <a:srgbClr val="CADCFC"/>
                 </a:solidFill>
@@ -1900,7 +1900,7 @@
               </a:rPr>
               <a:t>Cash</a:t>
             </a:r>
-            <a:endParaRPr lang="en-US" sz="1150" dirty="0"/>
+            <a:endParaRPr lang="en-US" sz="1050" dirty="0"/>
           </a:p>
         </p:txBody>
       </p:sp>
@@ -1912,8 +1912,8 @@
         </p:nvSpPr>
         <p:spPr>
           <a:xfrm>
-            <a:off x="4361688" y="4430268"/>
-            <a:ext cx="274320" cy="274320"/>
+            <a:off x="4361688" y="3999357"/>
+            <a:ext cx="246888" cy="246888"/>
           </a:xfrm>
           <a:prstGeom prst="ellipse">
             <a:avLst/>
@@ -1940,8 +1940,8 @@
         </p:blipFill>
         <p:spPr>
           <a:xfrm>
-            <a:off x="4433011" y="4501591"/>
-            <a:ext cx="131674" cy="131674"/>
+            <a:off x="4425879" y="4063548"/>
+            <a:ext cx="118506" cy="118506"/>
           </a:xfrm>
           <a:prstGeom prst="rect">
             <a:avLst/>
@@ -1956,8 +1956,8 @@
         </p:nvSpPr>
         <p:spPr>
           <a:xfrm>
-            <a:off x="4764024" y="4398264"/>
-            <a:ext cx="1408176" cy="338328"/>
+            <a:off x="4727448" y="3973068"/>
+            <a:ext cx="1453896" cy="299466"/>
           </a:xfrm>
           <a:prstGeom prst="rect">
             <a:avLst/>
@@ -1973,7 +1973,7 @@
               <a:buNone/>
             </a:pPr>
             <a:r>
-              <a:rPr lang="en-US" sz="1150" b="1" dirty="0">
+              <a:rPr lang="en-US" sz="1050" b="1" dirty="0">
                 <a:solidFill>
                   <a:srgbClr val="CADCFC"/>
                 </a:solidFill>
@@ -1983,7 +1983,7 @@
               </a:rPr>
               <a:t>Customer Info</a:t>
             </a:r>
-            <a:endParaRPr lang="en-US" sz="1150" dirty="0"/>
+            <a:endParaRPr lang="en-US" sz="1050" dirty="0"/>
           </a:p>
         </p:txBody>
       </p:sp>
@@ -1995,8 +1995,8 @@
         </p:nvSpPr>
         <p:spPr>
           <a:xfrm>
-            <a:off x="4361688" y="4805172"/>
-            <a:ext cx="274320" cy="274320"/>
+            <a:off x="4361688" y="4326255"/>
+            <a:ext cx="246888" cy="246888"/>
           </a:xfrm>
           <a:prstGeom prst="ellipse">
             <a:avLst/>
@@ -2023,8 +2023,8 @@
         </p:blipFill>
         <p:spPr>
           <a:xfrm>
-            <a:off x="4433011" y="4876495"/>
-            <a:ext cx="131674" cy="131674"/>
+            <a:off x="4425879" y="4390446"/>
+            <a:ext cx="118506" cy="118506"/>
           </a:xfrm>
           <a:prstGeom prst="rect">
             <a:avLst/>
@@ -2039,8 +2039,8 @@
         </p:nvSpPr>
         <p:spPr>
           <a:xfrm>
-            <a:off x="4764024" y="4773168"/>
-            <a:ext cx="1408176" cy="338328"/>
+            <a:off x="4727448" y="4299966"/>
+            <a:ext cx="1453896" cy="299466"/>
           </a:xfrm>
           <a:prstGeom prst="rect">
             <a:avLst/>
@@ -2056,7 +2056,7 @@
               <a:buNone/>
             </a:pPr>
             <a:r>
-              <a:rPr lang="en-US" sz="1150" b="1" dirty="0">
+              <a:rPr lang="en-US" sz="1050" b="1" dirty="0">
                 <a:solidFill>
                   <a:srgbClr val="CADCFC"/>
                 </a:solidFill>
@@ -2066,7 +2066,7 @@
               </a:rPr>
               <a:t>Tax Info</a:t>
             </a:r>
-            <a:endParaRPr lang="en-US" sz="1150" dirty="0"/>
+            <a:endParaRPr lang="en-US" sz="1050" dirty="0"/>
           </a:p>
         </p:txBody>
       </p:sp>
@@ -2078,8 +2078,8 @@
         </p:nvSpPr>
         <p:spPr>
           <a:xfrm>
-            <a:off x="4361688" y="5180076"/>
-            <a:ext cx="274320" cy="274320"/>
+            <a:off x="4361688" y="4653153"/>
+            <a:ext cx="246888" cy="246888"/>
           </a:xfrm>
           <a:prstGeom prst="ellipse">
             <a:avLst/>
@@ -2106,8 +2106,8 @@
         </p:blipFill>
         <p:spPr>
           <a:xfrm>
-            <a:off x="4433011" y="5251399"/>
-            <a:ext cx="131674" cy="131674"/>
+            <a:off x="4425879" y="4717344"/>
+            <a:ext cx="118506" cy="118506"/>
           </a:xfrm>
           <a:prstGeom prst="rect">
             <a:avLst/>
@@ -2122,8 +2122,8 @@
         </p:nvSpPr>
         <p:spPr>
           <a:xfrm>
-            <a:off x="4764024" y="5148072"/>
-            <a:ext cx="1408176" cy="338328"/>
+            <a:off x="4727448" y="4626864"/>
+            <a:ext cx="1453896" cy="299466"/>
           </a:xfrm>
           <a:prstGeom prst="rect">
             <a:avLst/>
@@ -2139,7 +2139,7 @@
               <a:buNone/>
             </a:pPr>
             <a:r>
-              <a:rPr lang="en-US" sz="1150" b="1" dirty="0">
+              <a:rPr lang="en-US" sz="1050" b="1" dirty="0">
                 <a:solidFill>
                   <a:srgbClr val="CADCFC"/>
                 </a:solidFill>
@@ -2149,7 +2149,7 @@
               </a:rPr>
               <a:t>Dividends</a:t>
             </a:r>
-            <a:endParaRPr lang="en-US" sz="1150" dirty="0"/>
+            <a:endParaRPr lang="en-US" sz="1050" dirty="0"/>
           </a:p>
         </p:txBody>
       </p:sp>
@@ -2161,8 +2161,8 @@
         </p:nvSpPr>
         <p:spPr>
           <a:xfrm>
-            <a:off x="4361688" y="5554980"/>
-            <a:ext cx="274320" cy="274320"/>
+            <a:off x="4361688" y="4980051"/>
+            <a:ext cx="246888" cy="246888"/>
           </a:xfrm>
           <a:prstGeom prst="ellipse">
             <a:avLst/>
@@ -2189,8 +2189,8 @@
         </p:blipFill>
         <p:spPr>
           <a:xfrm>
-            <a:off x="4433011" y="5626303"/>
-            <a:ext cx="131674" cy="131674"/>
+            <a:off x="4425879" y="5044242"/>
+            <a:ext cx="118506" cy="118506"/>
           </a:xfrm>
           <a:prstGeom prst="rect">
             <a:avLst/>
@@ -2205,8 +2205,8 @@
         </p:nvSpPr>
         <p:spPr>
           <a:xfrm>
-            <a:off x="4764024" y="5522976"/>
-            <a:ext cx="1408176" cy="338328"/>
+            <a:off x="4727448" y="4953762"/>
+            <a:ext cx="1453896" cy="299466"/>
           </a:xfrm>
           <a:prstGeom prst="rect">
             <a:avLst/>
@@ -2222,7 +2222,7 @@
               <a:buNone/>
             </a:pPr>
             <a:r>
-              <a:rPr lang="en-US" sz="1150" b="1" dirty="0">
+              <a:rPr lang="en-US" sz="1050" b="1" dirty="0">
                 <a:solidFill>
                   <a:srgbClr val="CADCFC"/>
                 </a:solidFill>
@@ -2232,13 +2232,179 @@
               </a:rPr>
               <a:t>Holdings</a:t>
             </a:r>
-            <a:endParaRPr lang="en-US" sz="1150" dirty="0"/>
+            <a:endParaRPr lang="en-US" sz="1050" dirty="0"/>
           </a:p>
         </p:txBody>
       </p:sp>
       <p:sp>
         <p:nvSpPr>
           <p:cNvPr id="35" name="Shape 26"/>
+          <p:cNvSpPr/>
+          <p:nvPr/>
+        </p:nvSpPr>
+        <p:spPr>
+          <a:xfrm>
+            <a:off x="4361688" y="5306949"/>
+            <a:ext cx="246888" cy="246888"/>
+          </a:xfrm>
+          <a:prstGeom prst="ellipse">
+            <a:avLst/>
+          </a:prstGeom>
+          <a:solidFill>
+            <a:srgbClr val="3A4694"/>
+          </a:solidFill>
+          <a:ln/>
+        </p:spPr>
+      </p:sp>
+      <p:pic>
+        <p:nvPicPr>
+          <p:cNvPr id="36" name="Image 7" descr="preencoded.png">    </p:cNvPr>
+          <p:cNvPicPr>
+            <a:picLocks noChangeAspect="1"/>
+          </p:cNvPicPr>
+          <p:nvPr/>
+        </p:nvPicPr>
+        <p:blipFill>
+          <a:blip r:embed="rId8"/>
+          <a:stretch>
+            <a:fillRect/>
+          </a:stretch>
+        </p:blipFill>
+        <p:spPr>
+          <a:xfrm>
+            <a:off x="4425879" y="5371140"/>
+            <a:ext cx="118506" cy="118506"/>
+          </a:xfrm>
+          <a:prstGeom prst="rect">
+            <a:avLst/>
+          </a:prstGeom>
+        </p:spPr>
+      </p:pic>
+      <p:sp>
+        <p:nvSpPr>
+          <p:cNvPr id="37" name="Text 27"/>
+          <p:cNvSpPr txBox="1"/>
+          <p:nvPr/>
+        </p:nvSpPr>
+        <p:spPr>
+          <a:xfrm>
+            <a:off x="4727448" y="5280660"/>
+            <a:ext cx="1453896" cy="299466"/>
+          </a:xfrm>
+          <a:prstGeom prst="rect">
+            <a:avLst/>
+          </a:prstGeom>
+          <a:noFill/>
+          <a:ln/>
+        </p:spPr>
+        <p:txBody>
+          <a:bodyPr wrap="square" lIns="0" tIns="0" rIns="0" bIns="0" rtlCol="0" anchor="ctr"/>
+          <a:lstStyle/>
+          <a:p>
+            <a:pPr algn="l" indent="0" marL="0">
+              <a:buNone/>
+            </a:pPr>
+            <a:r>
+              <a:rPr lang="en-US" sz="1050" b="1" dirty="0">
+                <a:solidFill>
+                  <a:srgbClr val="CADCFC"/>
+                </a:solidFill>
+                <a:latin typeface="Calibri" pitchFamily="34" charset="0"/>
+                <a:ea typeface="Calibri" pitchFamily="34" charset="-122"/>
+                <a:cs typeface="Calibri" pitchFamily="34" charset="-120"/>
+              </a:rPr>
+              <a:t>Payments</a:t>
+            </a:r>
+            <a:endParaRPr lang="en-US" sz="1050" dirty="0"/>
+          </a:p>
+        </p:txBody>
+      </p:sp>
+      <p:sp>
+        <p:nvSpPr>
+          <p:cNvPr id="38" name="Shape 28"/>
+          <p:cNvSpPr/>
+          <p:nvPr/>
+        </p:nvSpPr>
+        <p:spPr>
+          <a:xfrm>
+            <a:off x="4361688" y="5633847"/>
+            <a:ext cx="246888" cy="246888"/>
+          </a:xfrm>
+          <a:prstGeom prst="ellipse">
+            <a:avLst/>
+          </a:prstGeom>
+          <a:solidFill>
+            <a:srgbClr val="3A4694"/>
+          </a:solidFill>
+          <a:ln/>
+        </p:spPr>
+      </p:sp>
+      <p:pic>
+        <p:nvPicPr>
+          <p:cNvPr id="39" name="Image 8" descr="preencoded.png">    </p:cNvPr>
+          <p:cNvPicPr>
+            <a:picLocks noChangeAspect="1"/>
+          </p:cNvPicPr>
+          <p:nvPr/>
+        </p:nvPicPr>
+        <p:blipFill>
+          <a:blip r:embed="rId9"/>
+          <a:stretch>
+            <a:fillRect/>
+          </a:stretch>
+        </p:blipFill>
+        <p:spPr>
+          <a:xfrm>
+            <a:off x="4425879" y="5698038"/>
+            <a:ext cx="118506" cy="118506"/>
+          </a:xfrm>
+          <a:prstGeom prst="rect">
+            <a:avLst/>
+          </a:prstGeom>
+        </p:spPr>
+      </p:pic>
+      <p:sp>
+        <p:nvSpPr>
+          <p:cNvPr id="40" name="Text 29"/>
+          <p:cNvSpPr txBox="1"/>
+          <p:nvPr/>
+        </p:nvSpPr>
+        <p:spPr>
+          <a:xfrm>
+            <a:off x="4727448" y="5607558"/>
+            <a:ext cx="1453896" cy="299466"/>
+          </a:xfrm>
+          <a:prstGeom prst="rect">
+            <a:avLst/>
+          </a:prstGeom>
+          <a:noFill/>
+          <a:ln/>
+        </p:spPr>
+        <p:txBody>
+          <a:bodyPr wrap="square" lIns="0" tIns="0" rIns="0" bIns="0" rtlCol="0" anchor="ctr"/>
+          <a:lstStyle/>
+          <a:p>
+            <a:pPr algn="l" indent="0" marL="0">
+              <a:buNone/>
+            </a:pPr>
+            <a:r>
+              <a:rPr lang="en-US" sz="1050" b="1" dirty="0">
+                <a:solidFill>
+                  <a:srgbClr val="CADCFC"/>
+                </a:solidFill>
+                <a:latin typeface="Calibri" pitchFamily="34" charset="0"/>
+                <a:ea typeface="Calibri" pitchFamily="34" charset="-122"/>
+                <a:cs typeface="Calibri" pitchFamily="34" charset="-120"/>
+              </a:rPr>
+              <a:t>Fund Billing</a:t>
+            </a:r>
+            <a:endParaRPr lang="en-US" sz="1050" dirty="0"/>
+          </a:p>
+        </p:txBody>
+      </p:sp>
+      <p:sp>
+        <p:nvSpPr>
+          <p:cNvPr id="41" name="Shape 30"/>
           <p:cNvSpPr/>
           <p:nvPr/>
         </p:nvSpPr>
@@ -2263,7 +2429,7 @@
       </p:sp>
       <p:sp>
         <p:nvSpPr>
-          <p:cNvPr id="36" name="Shape 27"/>
+          <p:cNvPr id="42" name="Shape 31"/>
           <p:cNvSpPr/>
           <p:nvPr/>
         </p:nvSpPr>
@@ -2288,7 +2454,7 @@
       </p:sp>
       <p:sp>
         <p:nvSpPr>
-          <p:cNvPr id="37" name="Shape 28"/>
+          <p:cNvPr id="43" name="Shape 32"/>
           <p:cNvSpPr/>
           <p:nvPr/>
         </p:nvSpPr>
@@ -2313,7 +2479,7 @@
       </p:sp>
       <p:sp>
         <p:nvSpPr>
-          <p:cNvPr id="38" name="Shape 29"/>
+          <p:cNvPr id="44" name="Shape 33"/>
           <p:cNvSpPr/>
           <p:nvPr/>
         </p:nvSpPr>
@@ -2338,7 +2504,7 @@
       </p:sp>
       <p:sp>
         <p:nvSpPr>
-          <p:cNvPr id="39" name="Shape 30"/>
+          <p:cNvPr id="45" name="Shape 34"/>
           <p:cNvSpPr/>
           <p:nvPr/>
         </p:nvSpPr>
@@ -2363,7 +2529,7 @@
       </p:sp>
       <p:sp>
         <p:nvSpPr>
-          <p:cNvPr id="40" name="Shape 31"/>
+          <p:cNvPr id="46" name="Shape 35"/>
           <p:cNvSpPr/>
           <p:nvPr/>
         </p:nvSpPr>
@@ -2387,7 +2553,7 @@
       </p:sp>
       <p:sp>
         <p:nvSpPr>
-          <p:cNvPr id="41" name="Shape 32"/>
+          <p:cNvPr id="47" name="Shape 36"/>
           <p:cNvSpPr/>
           <p:nvPr/>
         </p:nvSpPr>
@@ -2412,7 +2578,7 @@
       </p:sp>
       <p:sp>
         <p:nvSpPr>
-          <p:cNvPr id="42" name="Shape 33"/>
+          <p:cNvPr id="48" name="Shape 37"/>
           <p:cNvSpPr/>
           <p:nvPr/>
         </p:nvSpPr>
@@ -2437,7 +2603,7 @@
       </p:sp>
       <p:sp>
         <p:nvSpPr>
-          <p:cNvPr id="43" name="Shape 34"/>
+          <p:cNvPr id="49" name="Shape 38"/>
           <p:cNvSpPr/>
           <p:nvPr/>
         </p:nvSpPr>
@@ -2461,7 +2627,7 @@
       </p:sp>
       <p:sp>
         <p:nvSpPr>
-          <p:cNvPr id="44" name="Shape 35"/>
+          <p:cNvPr id="50" name="Shape 39"/>
           <p:cNvSpPr/>
           <p:nvPr/>
         </p:nvSpPr>
@@ -2485,7 +2651,7 @@
       </p:sp>
       <p:sp>
         <p:nvSpPr>
-          <p:cNvPr id="45" name="Shape 36"/>
+          <p:cNvPr id="51" name="Shape 40"/>
           <p:cNvSpPr/>
           <p:nvPr/>
         </p:nvSpPr>
@@ -2510,7 +2676,7 @@
       </p:sp>
       <p:sp>
         <p:nvSpPr>
-          <p:cNvPr id="46" name="Shape 37"/>
+          <p:cNvPr id="52" name="Shape 41"/>
           <p:cNvSpPr/>
           <p:nvPr/>
         </p:nvSpPr>
@@ -2534,7 +2700,7 @@
       </p:sp>
       <p:sp>
         <p:nvSpPr>
-          <p:cNvPr id="47" name="Shape 38"/>
+          <p:cNvPr id="53" name="Shape 42"/>
           <p:cNvSpPr/>
           <p:nvPr/>
         </p:nvSpPr>
@@ -2558,7 +2724,7 @@
       </p:sp>
       <p:sp>
         <p:nvSpPr>
-          <p:cNvPr id="48" name="Shape 39"/>
+          <p:cNvPr id="54" name="Shape 43"/>
           <p:cNvSpPr/>
           <p:nvPr/>
         </p:nvSpPr>
@@ -2592,7 +2758,7 @@
       </p:sp>
       <p:sp>
         <p:nvSpPr>
-          <p:cNvPr id="49" name="Shape 40"/>
+          <p:cNvPr id="55" name="Shape 44"/>
           <p:cNvSpPr/>
           <p:nvPr/>
         </p:nvSpPr>
@@ -2612,14 +2778,14 @@
       </p:sp>
       <p:pic>
         <p:nvPicPr>
-          <p:cNvPr id="50" name="Image 7" descr="preencoded.png">    </p:cNvPr>
+          <p:cNvPr id="56" name="Image 9" descr="preencoded.png">    </p:cNvPr>
           <p:cNvPicPr>
             <a:picLocks noChangeAspect="1"/>
           </p:cNvPicPr>
           <p:nvPr/>
         </p:nvPicPr>
         <p:blipFill>
-          <a:blip r:embed="rId8"/>
+          <a:blip r:embed="rId10"/>
           <a:stretch>
             <a:fillRect/>
           </a:stretch>
@@ -2636,7 +2802,7 @@
       </p:pic>
       <p:sp>
         <p:nvSpPr>
-          <p:cNvPr id="51" name="Text 41"/>
+          <p:cNvPr id="57" name="Text 45"/>
           <p:cNvSpPr txBox="1"/>
           <p:nvPr/>
         </p:nvSpPr>
@@ -2698,7 +2864,7 @@
       </p:sp>
       <p:sp>
         <p:nvSpPr>
-          <p:cNvPr id="52" name="Shape 42"/>
+          <p:cNvPr id="58" name="Shape 46"/>
           <p:cNvSpPr/>
           <p:nvPr/>
         </p:nvSpPr>
@@ -2732,7 +2898,7 @@
       </p:sp>
       <p:sp>
         <p:nvSpPr>
-          <p:cNvPr id="53" name="Shape 43"/>
+          <p:cNvPr id="59" name="Shape 47"/>
           <p:cNvSpPr/>
           <p:nvPr/>
         </p:nvSpPr>
@@ -2752,14 +2918,14 @@
       </p:sp>
       <p:pic>
         <p:nvPicPr>
-          <p:cNvPr id="54" name="Image 8" descr="preencoded.png">    </p:cNvPr>
+          <p:cNvPr id="60" name="Image 10" descr="preencoded.png">    </p:cNvPr>
           <p:cNvPicPr>
             <a:picLocks noChangeAspect="1"/>
           </p:cNvPicPr>
           <p:nvPr/>
         </p:nvPicPr>
         <p:blipFill>
-          <a:blip r:embed="rId9"/>
+          <a:blip r:embed="rId11"/>
           <a:stretch>
             <a:fillRect/>
           </a:stretch>
@@ -2776,7 +2942,7 @@
       </p:pic>
       <p:sp>
         <p:nvSpPr>
-          <p:cNvPr id="55" name="Text 44"/>
+          <p:cNvPr id="61" name="Text 48"/>
           <p:cNvSpPr txBox="1"/>
           <p:nvPr/>
         </p:nvSpPr>
@@ -2838,7 +3004,7 @@
       </p:sp>
       <p:sp>
         <p:nvSpPr>
-          <p:cNvPr id="56" name="Shape 45"/>
+          <p:cNvPr id="62" name="Shape 49"/>
           <p:cNvSpPr/>
           <p:nvPr/>
         </p:nvSpPr>
@@ -2872,7 +3038,7 @@
       </p:sp>
       <p:sp>
         <p:nvSpPr>
-          <p:cNvPr id="57" name="Shape 46"/>
+          <p:cNvPr id="63" name="Shape 50"/>
           <p:cNvSpPr/>
           <p:nvPr/>
         </p:nvSpPr>
@@ -2892,14 +3058,14 @@
       </p:sp>
       <p:pic>
         <p:nvPicPr>
-          <p:cNvPr id="58" name="Image 9" descr="preencoded.png">    </p:cNvPr>
+          <p:cNvPr id="64" name="Image 11" descr="preencoded.png">    </p:cNvPr>
           <p:cNvPicPr>
             <a:picLocks noChangeAspect="1"/>
           </p:cNvPicPr>
           <p:nvPr/>
         </p:nvPicPr>
         <p:blipFill>
-          <a:blip r:embed="rId10"/>
+          <a:blip r:embed="rId12"/>
           <a:stretch>
             <a:fillRect/>
           </a:stretch>
@@ -2916,7 +3082,7 @@
       </p:pic>
       <p:sp>
         <p:nvSpPr>
-          <p:cNvPr id="59" name="Text 47"/>
+          <p:cNvPr id="65" name="Text 51"/>
           <p:cNvSpPr txBox="1"/>
           <p:nvPr/>
         </p:nvSpPr>
@@ -2978,7 +3144,7 @@
       </p:sp>
       <p:sp>
         <p:nvSpPr>
-          <p:cNvPr id="60" name="Shape 48"/>
+          <p:cNvPr id="66" name="Shape 52"/>
           <p:cNvSpPr/>
           <p:nvPr/>
         </p:nvSpPr>
@@ -3012,7 +3178,7 @@
       </p:sp>
       <p:sp>
         <p:nvSpPr>
-          <p:cNvPr id="61" name="Shape 49"/>
+          <p:cNvPr id="67" name="Shape 53"/>
           <p:cNvSpPr/>
           <p:nvPr/>
         </p:nvSpPr>
@@ -3032,14 +3198,14 @@
       </p:sp>
       <p:pic>
         <p:nvPicPr>
-          <p:cNvPr id="62" name="Image 10" descr="preencoded.png">    </p:cNvPr>
+          <p:cNvPr id="68" name="Image 12" descr="preencoded.png">    </p:cNvPr>
           <p:cNvPicPr>
             <a:picLocks noChangeAspect="1"/>
           </p:cNvPicPr>
           <p:nvPr/>
         </p:nvPicPr>
         <p:blipFill>
-          <a:blip r:embed="rId11"/>
+          <a:blip r:embed="rId13"/>
           <a:stretch>
             <a:fillRect/>
           </a:stretch>
@@ -3056,7 +3222,7 @@
       </p:pic>
       <p:sp>
         <p:nvSpPr>
-          <p:cNvPr id="63" name="Text 50"/>
+          <p:cNvPr id="69" name="Text 54"/>
           <p:cNvSpPr txBox="1"/>
           <p:nvPr/>
         </p:nvSpPr>
@@ -3118,7 +3284,7 @@
       </p:sp>
       <p:sp>
         <p:nvSpPr>
-          <p:cNvPr id="64" name="Shape 51"/>
+          <p:cNvPr id="70" name="Shape 55"/>
           <p:cNvSpPr/>
           <p:nvPr/>
         </p:nvSpPr>
@@ -3152,7 +3318,7 @@
       </p:sp>
       <p:sp>
         <p:nvSpPr>
-          <p:cNvPr id="65" name="Shape 52"/>
+          <p:cNvPr id="71" name="Shape 56"/>
           <p:cNvSpPr/>
           <p:nvPr/>
         </p:nvSpPr>
@@ -3172,14 +3338,14 @@
       </p:sp>
       <p:pic>
         <p:nvPicPr>
-          <p:cNvPr id="66" name="Image 11" descr="preencoded.png">    </p:cNvPr>
+          <p:cNvPr id="72" name="Image 13" descr="preencoded.png">    </p:cNvPr>
           <p:cNvPicPr>
             <a:picLocks noChangeAspect="1"/>
           </p:cNvPicPr>
           <p:nvPr/>
         </p:nvPicPr>
         <p:blipFill>
-          <a:blip r:embed="rId12"/>
+          <a:blip r:embed="rId14"/>
           <a:stretch>
             <a:fillRect/>
           </a:stretch>
@@ -3196,7 +3362,7 @@
       </p:pic>
       <p:sp>
         <p:nvSpPr>
-          <p:cNvPr id="67" name="Text 53"/>
+          <p:cNvPr id="73" name="Text 57"/>
           <p:cNvSpPr txBox="1"/>
           <p:nvPr/>
         </p:nvSpPr>
@@ -3238,7 +3404,7 @@
       </p:sp>
       <p:sp>
         <p:nvSpPr>
-          <p:cNvPr id="68" name="Shape 54"/>
+          <p:cNvPr id="74" name="Shape 58"/>
           <p:cNvSpPr/>
           <p:nvPr/>
         </p:nvSpPr>
@@ -3272,7 +3438,7 @@
       </p:sp>
       <p:sp>
         <p:nvSpPr>
-          <p:cNvPr id="69" name="Shape 55"/>
+          <p:cNvPr id="75" name="Shape 59"/>
           <p:cNvSpPr/>
           <p:nvPr/>
         </p:nvSpPr>
@@ -3292,14 +3458,14 @@
       </p:sp>
       <p:pic>
         <p:nvPicPr>
-          <p:cNvPr id="70" name="Image 12" descr="preencoded.png">    </p:cNvPr>
+          <p:cNvPr id="76" name="Image 14" descr="preencoded.png">    </p:cNvPr>
           <p:cNvPicPr>
             <a:picLocks noChangeAspect="1"/>
           </p:cNvPicPr>
           <p:nvPr/>
         </p:nvPicPr>
         <p:blipFill>
-          <a:blip r:embed="rId13"/>
+          <a:blip r:embed="rId15"/>
           <a:stretch>
             <a:fillRect/>
           </a:stretch>
@@ -3316,7 +3482,7 @@
       </p:pic>
       <p:sp>
         <p:nvSpPr>
-          <p:cNvPr id="71" name="Text 56"/>
+          <p:cNvPr id="77" name="Text 60"/>
           <p:cNvSpPr txBox="1"/>
           <p:nvPr/>
         </p:nvSpPr>
@@ -3378,7 +3544,7 @@
       </p:sp>
       <p:sp>
         <p:nvSpPr>
-          <p:cNvPr id="72" name="Shape 57"/>
+          <p:cNvPr id="78" name="Shape 61"/>
           <p:cNvSpPr/>
           <p:nvPr/>
         </p:nvSpPr>
@@ -3412,7 +3578,7 @@
       </p:sp>
       <p:sp>
         <p:nvSpPr>
-          <p:cNvPr id="73" name="Shape 58"/>
+          <p:cNvPr id="79" name="Shape 62"/>
           <p:cNvSpPr/>
           <p:nvPr/>
         </p:nvSpPr>
@@ -3432,14 +3598,14 @@
       </p:sp>
       <p:pic>
         <p:nvPicPr>
-          <p:cNvPr id="74" name="Image 13" descr="preencoded.png">    </p:cNvPr>
+          <p:cNvPr id="80" name="Image 15" descr="preencoded.png">    </p:cNvPr>
           <p:cNvPicPr>
             <a:picLocks noChangeAspect="1"/>
           </p:cNvPicPr>
           <p:nvPr/>
         </p:nvPicPr>
         <p:blipFill>
-          <a:blip r:embed="rId14"/>
+          <a:blip r:embed="rId16"/>
           <a:stretch>
             <a:fillRect/>
           </a:stretch>
@@ -3456,7 +3622,7 @@
       </p:pic>
       <p:sp>
         <p:nvSpPr>
-          <p:cNvPr id="75" name="Text 59"/>
+          <p:cNvPr id="81" name="Text 63"/>
           <p:cNvSpPr txBox="1"/>
           <p:nvPr/>
         </p:nvSpPr>
@@ -3498,7 +3664,7 @@
       </p:sp>
       <p:sp>
         <p:nvSpPr>
-          <p:cNvPr id="76" name="Shape 60"/>
+          <p:cNvPr id="82" name="Shape 64"/>
           <p:cNvSpPr/>
           <p:nvPr/>
         </p:nvSpPr>
@@ -3532,7 +3698,7 @@
       </p:sp>
       <p:sp>
         <p:nvSpPr>
-          <p:cNvPr id="77" name="Shape 61"/>
+          <p:cNvPr id="83" name="Shape 65"/>
           <p:cNvSpPr/>
           <p:nvPr/>
         </p:nvSpPr>
@@ -3552,14 +3718,14 @@
       </p:sp>
       <p:pic>
         <p:nvPicPr>
-          <p:cNvPr id="78" name="Image 14" descr="preencoded.png">    </p:cNvPr>
+          <p:cNvPr id="84" name="Image 16" descr="preencoded.png">    </p:cNvPr>
           <p:cNvPicPr>
             <a:picLocks noChangeAspect="1"/>
           </p:cNvPicPr>
           <p:nvPr/>
         </p:nvPicPr>
         <p:blipFill>
-          <a:blip r:embed="rId15"/>
+          <a:blip r:embed="rId17"/>
           <a:stretch>
             <a:fillRect/>
           </a:stretch>
@@ -3576,7 +3742,7 @@
       </p:pic>
       <p:sp>
         <p:nvSpPr>
-          <p:cNvPr id="79" name="Text 62"/>
+          <p:cNvPr id="85" name="Text 66"/>
           <p:cNvSpPr txBox="1"/>
           <p:nvPr/>
         </p:nvSpPr>
@@ -3618,7 +3784,7 @@
       </p:sp>
       <p:sp>
         <p:nvSpPr>
-          <p:cNvPr id="80" name="Shape 63"/>
+          <p:cNvPr id="86" name="Shape 67"/>
           <p:cNvSpPr/>
           <p:nvPr/>
         </p:nvSpPr>
@@ -3652,7 +3818,7 @@
       </p:sp>
       <p:sp>
         <p:nvSpPr>
-          <p:cNvPr id="81" name="Shape 64"/>
+          <p:cNvPr id="87" name="Shape 68"/>
           <p:cNvSpPr/>
           <p:nvPr/>
         </p:nvSpPr>
@@ -3672,14 +3838,14 @@
       </p:sp>
       <p:pic>
         <p:nvPicPr>
-          <p:cNvPr id="82" name="Image 15" descr="preencoded.png">    </p:cNvPr>
+          <p:cNvPr id="88" name="Image 17" descr="preencoded.png">    </p:cNvPr>
           <p:cNvPicPr>
             <a:picLocks noChangeAspect="1"/>
           </p:cNvPicPr>
           <p:nvPr/>
         </p:nvPicPr>
         <p:blipFill>
-          <a:blip r:embed="rId16"/>
+          <a:blip r:embed="rId18"/>
           <a:stretch>
             <a:fillRect/>
           </a:stretch>
@@ -3696,7 +3862,7 @@
       </p:pic>
       <p:sp>
         <p:nvSpPr>
-          <p:cNvPr id="83" name="Text 65"/>
+          <p:cNvPr id="89" name="Text 69"/>
           <p:cNvSpPr txBox="1"/>
           <p:nvPr/>
         </p:nvSpPr>
@@ -3738,7 +3904,7 @@
       </p:sp>
       <p:sp>
         <p:nvSpPr>
-          <p:cNvPr id="84" name="Shape 66"/>
+          <p:cNvPr id="90" name="Shape 70"/>
           <p:cNvSpPr/>
           <p:nvPr/>
         </p:nvSpPr>
@@ -3772,7 +3938,7 @@
       </p:sp>
       <p:sp>
         <p:nvSpPr>
-          <p:cNvPr id="85" name="Shape 67"/>
+          <p:cNvPr id="91" name="Shape 71"/>
           <p:cNvSpPr/>
           <p:nvPr/>
         </p:nvSpPr>
@@ -3792,14 +3958,14 @@
       </p:sp>
       <p:pic>
         <p:nvPicPr>
-          <p:cNvPr id="86" name="Image 16" descr="preencoded.png">    </p:cNvPr>
+          <p:cNvPr id="92" name="Image 18" descr="preencoded.png">    </p:cNvPr>
           <p:cNvPicPr>
             <a:picLocks noChangeAspect="1"/>
           </p:cNvPicPr>
           <p:nvPr/>
         </p:nvPicPr>
         <p:blipFill>
-          <a:blip r:embed="rId17"/>
+          <a:blip r:embed="rId19"/>
           <a:stretch>
             <a:fillRect/>
           </a:stretch>
@@ -3816,7 +3982,7 @@
       </p:pic>
       <p:sp>
         <p:nvSpPr>
-          <p:cNvPr id="87" name="Text 68"/>
+          <p:cNvPr id="93" name="Text 72"/>
           <p:cNvSpPr txBox="1"/>
           <p:nvPr/>
         </p:nvSpPr>
@@ -3858,7 +4024,7 @@
       </p:sp>
       <p:sp>
         <p:nvSpPr>
-          <p:cNvPr id="88" name="Shape 69"/>
+          <p:cNvPr id="94" name="Shape 73"/>
           <p:cNvSpPr/>
           <p:nvPr/>
         </p:nvSpPr>
@@ -3892,7 +4058,7 @@
       </p:sp>
       <p:sp>
         <p:nvSpPr>
-          <p:cNvPr id="89" name="Shape 70"/>
+          <p:cNvPr id="95" name="Shape 74"/>
           <p:cNvSpPr/>
           <p:nvPr/>
         </p:nvSpPr>
@@ -3912,14 +4078,14 @@
       </p:sp>
       <p:pic>
         <p:nvPicPr>
-          <p:cNvPr id="90" name="Image 17" descr="preencoded.png">    </p:cNvPr>
+          <p:cNvPr id="96" name="Image 19" descr="preencoded.png">    </p:cNvPr>
           <p:cNvPicPr>
             <a:picLocks noChangeAspect="1"/>
           </p:cNvPicPr>
           <p:nvPr/>
         </p:nvPicPr>
         <p:blipFill>
-          <a:blip r:embed="rId18"/>
+          <a:blip r:embed="rId20"/>
           <a:stretch>
             <a:fillRect/>
           </a:stretch>
@@ -3936,7 +4102,7 @@
       </p:pic>
       <p:sp>
         <p:nvSpPr>
-          <p:cNvPr id="91" name="Text 71"/>
+          <p:cNvPr id="97" name="Text 75"/>
           <p:cNvSpPr txBox="1"/>
           <p:nvPr/>
         </p:nvSpPr>
@@ -3998,7 +4164,7 @@
       </p:sp>
       <p:sp>
         <p:nvSpPr>
-          <p:cNvPr id="92" name="Shape 72"/>
+          <p:cNvPr id="98" name="Shape 76"/>
           <p:cNvSpPr/>
           <p:nvPr/>
         </p:nvSpPr>
@@ -4032,7 +4198,7 @@
       </p:sp>
       <p:sp>
         <p:nvSpPr>
-          <p:cNvPr id="93" name="Shape 73"/>
+          <p:cNvPr id="99" name="Shape 77"/>
           <p:cNvSpPr/>
           <p:nvPr/>
         </p:nvSpPr>
@@ -4052,14 +4218,14 @@
       </p:sp>
       <p:pic>
         <p:nvPicPr>
-          <p:cNvPr id="94" name="Image 18" descr="preencoded.png">    </p:cNvPr>
+          <p:cNvPr id="100" name="Image 20" descr="preencoded.png">    </p:cNvPr>
           <p:cNvPicPr>
             <a:picLocks noChangeAspect="1"/>
           </p:cNvPicPr>
           <p:nvPr/>
         </p:nvPicPr>
         <p:blipFill>
-          <a:blip r:embed="rId19"/>
+          <a:blip r:embed="rId21"/>
           <a:stretch>
             <a:fillRect/>
           </a:stretch>
@@ -4076,7 +4242,7 @@
       </p:pic>
       <p:sp>
         <p:nvSpPr>
-          <p:cNvPr id="95" name="Text 74"/>
+          <p:cNvPr id="101" name="Text 78"/>
           <p:cNvSpPr txBox="1"/>
           <p:nvPr/>
         </p:nvSpPr>
@@ -4138,7 +4304,7 @@
       </p:sp>
       <p:sp>
         <p:nvSpPr>
-          <p:cNvPr id="96" name="Shape 75"/>
+          <p:cNvPr id="102" name="Shape 79"/>
           <p:cNvSpPr/>
           <p:nvPr/>
         </p:nvSpPr>
@@ -4172,7 +4338,7 @@
       </p:sp>
       <p:sp>
         <p:nvSpPr>
-          <p:cNvPr id="97" name="Shape 76"/>
+          <p:cNvPr id="103" name="Shape 80"/>
           <p:cNvSpPr/>
           <p:nvPr/>
         </p:nvSpPr>
@@ -4192,14 +4358,14 @@
       </p:sp>
       <p:pic>
         <p:nvPicPr>
-          <p:cNvPr id="98" name="Image 19" descr="preencoded.png">    </p:cNvPr>
+          <p:cNvPr id="104" name="Image 21" descr="preencoded.png">    </p:cNvPr>
           <p:cNvPicPr>
             <a:picLocks noChangeAspect="1"/>
           </p:cNvPicPr>
           <p:nvPr/>
         </p:nvPicPr>
         <p:blipFill>
-          <a:blip r:embed="rId20"/>
+          <a:blip r:embed="rId22"/>
           <a:stretch>
             <a:fillRect/>
           </a:stretch>
@@ -4216,7 +4382,7 @@
       </p:pic>
       <p:sp>
         <p:nvSpPr>
-          <p:cNvPr id="99" name="Text 77"/>
+          <p:cNvPr id="105" name="Text 81"/>
           <p:cNvSpPr txBox="1"/>
           <p:nvPr/>
         </p:nvSpPr>
@@ -4278,7 +4444,7 @@
       </p:sp>
       <p:sp>
         <p:nvSpPr>
-          <p:cNvPr id="100" name="Text 78"/>
+          <p:cNvPr id="106" name="Text 82"/>
           <p:cNvSpPr txBox="1"/>
           <p:nvPr/>
         </p:nvSpPr>
@@ -4317,7 +4483,7 @@
       </p:sp>
       <p:sp>
         <p:nvSpPr>
-          <p:cNvPr id="101" name="Text 79"/>
+          <p:cNvPr id="107" name="Text 83"/>
           <p:cNvSpPr txBox="1"/>
           <p:nvPr/>
         </p:nvSpPr>
@@ -4356,7 +4522,7 @@
       </p:sp>
       <p:sp>
         <p:nvSpPr>
-          <p:cNvPr id="102" name="Text 80"/>
+          <p:cNvPr id="108" name="Text 84"/>
           <p:cNvSpPr txBox="1"/>
           <p:nvPr/>
         </p:nvSpPr>

--- a/docs/presentations/Transfer_Agent_Data_Flow.pptx
+++ b/docs/presentations/Transfer_Agent_Data_Flow.pptx
@@ -1746,8 +1746,8 @@
         </p:nvSpPr>
         <p:spPr>
           <a:xfrm>
-            <a:off x="4361688" y="3345561"/>
-            <a:ext cx="246888" cy="246888"/>
+            <a:off x="4361688" y="3337560"/>
+            <a:ext cx="226568" cy="226568"/>
           </a:xfrm>
           <a:prstGeom prst="ellipse">
             <a:avLst/>
@@ -1774,8 +1774,8 @@
         </p:blipFill>
         <p:spPr>
           <a:xfrm>
-            <a:off x="4425879" y="3409752"/>
-            <a:ext cx="118506" cy="118506"/>
+            <a:off x="4420596" y="3396468"/>
+            <a:ext cx="108753" cy="108753"/>
           </a:xfrm>
           <a:prstGeom prst="rect">
             <a:avLst/>
@@ -1790,8 +1790,8 @@
         </p:nvSpPr>
         <p:spPr>
           <a:xfrm>
-            <a:off x="4727448" y="3319272"/>
-            <a:ext cx="1453896" cy="299466"/>
+            <a:off x="4707128" y="3319272"/>
+            <a:ext cx="1474216" cy="263144"/>
           </a:xfrm>
           <a:prstGeom prst="rect">
             <a:avLst/>
@@ -1829,8 +1829,8 @@
         </p:nvSpPr>
         <p:spPr>
           <a:xfrm>
-            <a:off x="4361688" y="3672459"/>
-            <a:ext cx="246888" cy="246888"/>
+            <a:off x="4361688" y="3628136"/>
+            <a:ext cx="226568" cy="226568"/>
           </a:xfrm>
           <a:prstGeom prst="ellipse">
             <a:avLst/>
@@ -1857,8 +1857,8 @@
         </p:blipFill>
         <p:spPr>
           <a:xfrm>
-            <a:off x="4425879" y="3736650"/>
-            <a:ext cx="118506" cy="118506"/>
+            <a:off x="4420596" y="3687044"/>
+            <a:ext cx="108753" cy="108753"/>
           </a:xfrm>
           <a:prstGeom prst="rect">
             <a:avLst/>
@@ -1873,8 +1873,91 @@
         </p:nvSpPr>
         <p:spPr>
           <a:xfrm>
-            <a:off x="4727448" y="3646170"/>
-            <a:ext cx="1453896" cy="299466"/>
+            <a:off x="4707128" y="3609848"/>
+            <a:ext cx="1474216" cy="263144"/>
+          </a:xfrm>
+          <a:prstGeom prst="rect">
+            <a:avLst/>
+          </a:prstGeom>
+          <a:noFill/>
+          <a:ln/>
+        </p:spPr>
+        <p:txBody>
+          <a:bodyPr wrap="square" lIns="0" tIns="0" rIns="0" bIns="0" rtlCol="0" anchor="ctr"/>
+          <a:lstStyle/>
+          <a:p>
+            <a:pPr algn="l" indent="0" marL="0">
+              <a:buNone/>
+            </a:pPr>
+            <a:r>
+              <a:rPr lang="en-US" sz="1050" b="1" dirty="0">
+                <a:solidFill>
+                  <a:srgbClr val="CADCFC"/>
+                </a:solidFill>
+                <a:latin typeface="Calibri" pitchFamily="34" charset="0"/>
+                <a:ea typeface="Calibri" pitchFamily="34" charset="-122"/>
+                <a:cs typeface="Calibri" pitchFamily="34" charset="-120"/>
+              </a:rPr>
+              <a:t>Order Corrections</a:t>
+            </a:r>
+            <a:endParaRPr lang="en-US" sz="1050" dirty="0"/>
+          </a:p>
+        </p:txBody>
+      </p:sp>
+      <p:sp>
+        <p:nvSpPr>
+          <p:cNvPr id="23" name="Shape 18"/>
+          <p:cNvSpPr/>
+          <p:nvPr/>
+        </p:nvSpPr>
+        <p:spPr>
+          <a:xfrm>
+            <a:off x="4361688" y="3918712"/>
+            <a:ext cx="226568" cy="226568"/>
+          </a:xfrm>
+          <a:prstGeom prst="ellipse">
+            <a:avLst/>
+          </a:prstGeom>
+          <a:solidFill>
+            <a:srgbClr val="3A4694"/>
+          </a:solidFill>
+          <a:ln/>
+        </p:spPr>
+      </p:sp>
+      <p:pic>
+        <p:nvPicPr>
+          <p:cNvPr id="24" name="Image 3" descr="preencoded.png">    </p:cNvPr>
+          <p:cNvPicPr>
+            <a:picLocks noChangeAspect="1"/>
+          </p:cNvPicPr>
+          <p:nvPr/>
+        </p:nvPicPr>
+        <p:blipFill>
+          <a:blip r:embed="rId4"/>
+          <a:stretch>
+            <a:fillRect/>
+          </a:stretch>
+        </p:blipFill>
+        <p:spPr>
+          <a:xfrm>
+            <a:off x="4420596" y="3977620"/>
+            <a:ext cx="108753" cy="108753"/>
+          </a:xfrm>
+          <a:prstGeom prst="rect">
+            <a:avLst/>
+          </a:prstGeom>
+        </p:spPr>
+      </p:pic>
+      <p:sp>
+        <p:nvSpPr>
+          <p:cNvPr id="25" name="Text 19"/>
+          <p:cNvSpPr txBox="1"/>
+          <p:nvPr/>
+        </p:nvSpPr>
+        <p:spPr>
+          <a:xfrm>
+            <a:off x="4707128" y="3900424"/>
+            <a:ext cx="1474216" cy="263144"/>
           </a:xfrm>
           <a:prstGeom prst="rect">
             <a:avLst/>
@@ -1906,14 +1989,14 @@
       </p:sp>
       <p:sp>
         <p:nvSpPr>
-          <p:cNvPr id="23" name="Shape 18"/>
-          <p:cNvSpPr/>
-          <p:nvPr/>
-        </p:nvSpPr>
-        <p:spPr>
-          <a:xfrm>
-            <a:off x="4361688" y="3999357"/>
-            <a:ext cx="246888" cy="246888"/>
+          <p:cNvPr id="26" name="Shape 20"/>
+          <p:cNvSpPr/>
+          <p:nvPr/>
+        </p:nvSpPr>
+        <p:spPr>
+          <a:xfrm>
+            <a:off x="4361688" y="4209288"/>
+            <a:ext cx="226568" cy="226568"/>
           </a:xfrm>
           <a:prstGeom prst="ellipse">
             <a:avLst/>
@@ -1926,22 +2009,22 @@
       </p:sp>
       <p:pic>
         <p:nvPicPr>
-          <p:cNvPr id="24" name="Image 3" descr="preencoded.png">    </p:cNvPr>
+          <p:cNvPr id="27" name="Image 4" descr="preencoded.png">    </p:cNvPr>
           <p:cNvPicPr>
             <a:picLocks noChangeAspect="1"/>
           </p:cNvPicPr>
           <p:nvPr/>
         </p:nvPicPr>
         <p:blipFill>
-          <a:blip r:embed="rId4"/>
+          <a:blip r:embed="rId5"/>
           <a:stretch>
             <a:fillRect/>
           </a:stretch>
         </p:blipFill>
         <p:spPr>
           <a:xfrm>
-            <a:off x="4425879" y="4063548"/>
-            <a:ext cx="118506" cy="118506"/>
+            <a:off x="4420596" y="4268196"/>
+            <a:ext cx="108753" cy="108753"/>
           </a:xfrm>
           <a:prstGeom prst="rect">
             <a:avLst/>
@@ -1950,14 +2033,14 @@
       </p:pic>
       <p:sp>
         <p:nvSpPr>
-          <p:cNvPr id="25" name="Text 19"/>
+          <p:cNvPr id="28" name="Text 21"/>
           <p:cNvSpPr txBox="1"/>
           <p:nvPr/>
         </p:nvSpPr>
         <p:spPr>
           <a:xfrm>
-            <a:off x="4727448" y="3973068"/>
-            <a:ext cx="1453896" cy="299466"/>
+            <a:off x="4707128" y="4191000"/>
+            <a:ext cx="1474216" cy="263144"/>
           </a:xfrm>
           <a:prstGeom prst="rect">
             <a:avLst/>
@@ -1989,14 +2072,14 @@
       </p:sp>
       <p:sp>
         <p:nvSpPr>
-          <p:cNvPr id="26" name="Shape 20"/>
-          <p:cNvSpPr/>
-          <p:nvPr/>
-        </p:nvSpPr>
-        <p:spPr>
-          <a:xfrm>
-            <a:off x="4361688" y="4326255"/>
-            <a:ext cx="246888" cy="246888"/>
+          <p:cNvPr id="29" name="Shape 22"/>
+          <p:cNvSpPr/>
+          <p:nvPr/>
+        </p:nvSpPr>
+        <p:spPr>
+          <a:xfrm>
+            <a:off x="4361688" y="4499864"/>
+            <a:ext cx="226568" cy="226568"/>
           </a:xfrm>
           <a:prstGeom prst="ellipse">
             <a:avLst/>
@@ -2009,22 +2092,22 @@
       </p:sp>
       <p:pic>
         <p:nvPicPr>
-          <p:cNvPr id="27" name="Image 4" descr="preencoded.png">    </p:cNvPr>
+          <p:cNvPr id="30" name="Image 5" descr="preencoded.png">    </p:cNvPr>
           <p:cNvPicPr>
             <a:picLocks noChangeAspect="1"/>
           </p:cNvPicPr>
           <p:nvPr/>
         </p:nvPicPr>
         <p:blipFill>
-          <a:blip r:embed="rId5"/>
+          <a:blip r:embed="rId6"/>
           <a:stretch>
             <a:fillRect/>
           </a:stretch>
         </p:blipFill>
         <p:spPr>
           <a:xfrm>
-            <a:off x="4425879" y="4390446"/>
-            <a:ext cx="118506" cy="118506"/>
+            <a:off x="4420596" y="4558772"/>
+            <a:ext cx="108753" cy="108753"/>
           </a:xfrm>
           <a:prstGeom prst="rect">
             <a:avLst/>
@@ -2033,14 +2116,14 @@
       </p:pic>
       <p:sp>
         <p:nvSpPr>
-          <p:cNvPr id="28" name="Text 21"/>
+          <p:cNvPr id="31" name="Text 23"/>
           <p:cNvSpPr txBox="1"/>
           <p:nvPr/>
         </p:nvSpPr>
         <p:spPr>
           <a:xfrm>
-            <a:off x="4727448" y="4299966"/>
-            <a:ext cx="1453896" cy="299466"/>
+            <a:off x="4707128" y="4481576"/>
+            <a:ext cx="1474216" cy="263144"/>
           </a:xfrm>
           <a:prstGeom prst="rect">
             <a:avLst/>
@@ -2072,14 +2155,14 @@
       </p:sp>
       <p:sp>
         <p:nvSpPr>
-          <p:cNvPr id="29" name="Shape 22"/>
-          <p:cNvSpPr/>
-          <p:nvPr/>
-        </p:nvSpPr>
-        <p:spPr>
-          <a:xfrm>
-            <a:off x="4361688" y="4653153"/>
-            <a:ext cx="246888" cy="246888"/>
+          <p:cNvPr id="32" name="Shape 24"/>
+          <p:cNvSpPr/>
+          <p:nvPr/>
+        </p:nvSpPr>
+        <p:spPr>
+          <a:xfrm>
+            <a:off x="4361688" y="4790440"/>
+            <a:ext cx="226568" cy="226568"/>
           </a:xfrm>
           <a:prstGeom prst="ellipse">
             <a:avLst/>
@@ -2092,22 +2175,22 @@
       </p:sp>
       <p:pic>
         <p:nvPicPr>
-          <p:cNvPr id="30" name="Image 5" descr="preencoded.png">    </p:cNvPr>
+          <p:cNvPr id="33" name="Image 6" descr="preencoded.png">    </p:cNvPr>
           <p:cNvPicPr>
             <a:picLocks noChangeAspect="1"/>
           </p:cNvPicPr>
           <p:nvPr/>
         </p:nvPicPr>
         <p:blipFill>
-          <a:blip r:embed="rId6"/>
+          <a:blip r:embed="rId7"/>
           <a:stretch>
             <a:fillRect/>
           </a:stretch>
         </p:blipFill>
         <p:spPr>
           <a:xfrm>
-            <a:off x="4425879" y="4717344"/>
-            <a:ext cx="118506" cy="118506"/>
+            <a:off x="4420596" y="4849348"/>
+            <a:ext cx="108753" cy="108753"/>
           </a:xfrm>
           <a:prstGeom prst="rect">
             <a:avLst/>
@@ -2116,14 +2199,14 @@
       </p:pic>
       <p:sp>
         <p:nvSpPr>
-          <p:cNvPr id="31" name="Text 23"/>
+          <p:cNvPr id="34" name="Text 25"/>
           <p:cNvSpPr txBox="1"/>
           <p:nvPr/>
         </p:nvSpPr>
         <p:spPr>
           <a:xfrm>
-            <a:off x="4727448" y="4626864"/>
-            <a:ext cx="1453896" cy="299466"/>
+            <a:off x="4707128" y="4772152"/>
+            <a:ext cx="1474216" cy="263144"/>
           </a:xfrm>
           <a:prstGeom prst="rect">
             <a:avLst/>
@@ -2155,14 +2238,14 @@
       </p:sp>
       <p:sp>
         <p:nvSpPr>
-          <p:cNvPr id="32" name="Shape 24"/>
-          <p:cNvSpPr/>
-          <p:nvPr/>
-        </p:nvSpPr>
-        <p:spPr>
-          <a:xfrm>
-            <a:off x="4361688" y="4980051"/>
-            <a:ext cx="246888" cy="246888"/>
+          <p:cNvPr id="35" name="Shape 26"/>
+          <p:cNvSpPr/>
+          <p:nvPr/>
+        </p:nvSpPr>
+        <p:spPr>
+          <a:xfrm>
+            <a:off x="4361688" y="5081016"/>
+            <a:ext cx="226568" cy="226568"/>
           </a:xfrm>
           <a:prstGeom prst="ellipse">
             <a:avLst/>
@@ -2175,22 +2258,22 @@
       </p:sp>
       <p:pic>
         <p:nvPicPr>
-          <p:cNvPr id="33" name="Image 6" descr="preencoded.png">    </p:cNvPr>
+          <p:cNvPr id="36" name="Image 7" descr="preencoded.png">    </p:cNvPr>
           <p:cNvPicPr>
             <a:picLocks noChangeAspect="1"/>
           </p:cNvPicPr>
           <p:nvPr/>
         </p:nvPicPr>
         <p:blipFill>
-          <a:blip r:embed="rId7"/>
+          <a:blip r:embed="rId8"/>
           <a:stretch>
             <a:fillRect/>
           </a:stretch>
         </p:blipFill>
         <p:spPr>
           <a:xfrm>
-            <a:off x="4425879" y="5044242"/>
-            <a:ext cx="118506" cy="118506"/>
+            <a:off x="4420596" y="5139924"/>
+            <a:ext cx="108753" cy="108753"/>
           </a:xfrm>
           <a:prstGeom prst="rect">
             <a:avLst/>
@@ -2199,14 +2282,14 @@
       </p:pic>
       <p:sp>
         <p:nvSpPr>
-          <p:cNvPr id="34" name="Text 25"/>
+          <p:cNvPr id="37" name="Text 27"/>
           <p:cNvSpPr txBox="1"/>
           <p:nvPr/>
         </p:nvSpPr>
         <p:spPr>
           <a:xfrm>
-            <a:off x="4727448" y="4953762"/>
-            <a:ext cx="1453896" cy="299466"/>
+            <a:off x="4707128" y="5062728"/>
+            <a:ext cx="1474216" cy="263144"/>
           </a:xfrm>
           <a:prstGeom prst="rect">
             <a:avLst/>
@@ -2238,14 +2321,14 @@
       </p:sp>
       <p:sp>
         <p:nvSpPr>
-          <p:cNvPr id="35" name="Shape 26"/>
-          <p:cNvSpPr/>
-          <p:nvPr/>
-        </p:nvSpPr>
-        <p:spPr>
-          <a:xfrm>
-            <a:off x="4361688" y="5306949"/>
-            <a:ext cx="246888" cy="246888"/>
+          <p:cNvPr id="38" name="Shape 28"/>
+          <p:cNvSpPr/>
+          <p:nvPr/>
+        </p:nvSpPr>
+        <p:spPr>
+          <a:xfrm>
+            <a:off x="4361688" y="5371592"/>
+            <a:ext cx="226568" cy="226568"/>
           </a:xfrm>
           <a:prstGeom prst="ellipse">
             <a:avLst/>
@@ -2258,22 +2341,22 @@
       </p:sp>
       <p:pic>
         <p:nvPicPr>
-          <p:cNvPr id="36" name="Image 7" descr="preencoded.png">    </p:cNvPr>
+          <p:cNvPr id="39" name="Image 8" descr="preencoded.png">    </p:cNvPr>
           <p:cNvPicPr>
             <a:picLocks noChangeAspect="1"/>
           </p:cNvPicPr>
           <p:nvPr/>
         </p:nvPicPr>
         <p:blipFill>
-          <a:blip r:embed="rId8"/>
+          <a:blip r:embed="rId9"/>
           <a:stretch>
             <a:fillRect/>
           </a:stretch>
         </p:blipFill>
         <p:spPr>
           <a:xfrm>
-            <a:off x="4425879" y="5371140"/>
-            <a:ext cx="118506" cy="118506"/>
+            <a:off x="4420596" y="5430500"/>
+            <a:ext cx="108753" cy="108753"/>
           </a:xfrm>
           <a:prstGeom prst="rect">
             <a:avLst/>
@@ -2282,14 +2365,14 @@
       </p:pic>
       <p:sp>
         <p:nvSpPr>
-          <p:cNvPr id="37" name="Text 27"/>
+          <p:cNvPr id="40" name="Text 29"/>
           <p:cNvSpPr txBox="1"/>
           <p:nvPr/>
         </p:nvSpPr>
         <p:spPr>
           <a:xfrm>
-            <a:off x="4727448" y="5280660"/>
-            <a:ext cx="1453896" cy="299466"/>
+            <a:off x="4707128" y="5353304"/>
+            <a:ext cx="1474216" cy="263144"/>
           </a:xfrm>
           <a:prstGeom prst="rect">
             <a:avLst/>
@@ -2321,14 +2404,14 @@
       </p:sp>
       <p:sp>
         <p:nvSpPr>
-          <p:cNvPr id="38" name="Shape 28"/>
-          <p:cNvSpPr/>
-          <p:nvPr/>
-        </p:nvSpPr>
-        <p:spPr>
-          <a:xfrm>
-            <a:off x="4361688" y="5633847"/>
-            <a:ext cx="246888" cy="246888"/>
+          <p:cNvPr id="41" name="Shape 30"/>
+          <p:cNvSpPr/>
+          <p:nvPr/>
+        </p:nvSpPr>
+        <p:spPr>
+          <a:xfrm>
+            <a:off x="4361688" y="5662168"/>
+            <a:ext cx="226568" cy="226568"/>
           </a:xfrm>
           <a:prstGeom prst="ellipse">
             <a:avLst/>
@@ -2341,22 +2424,22 @@
       </p:sp>
       <p:pic>
         <p:nvPicPr>
-          <p:cNvPr id="39" name="Image 8" descr="preencoded.png">    </p:cNvPr>
+          <p:cNvPr id="42" name="Image 9" descr="preencoded.png">    </p:cNvPr>
           <p:cNvPicPr>
             <a:picLocks noChangeAspect="1"/>
           </p:cNvPicPr>
           <p:nvPr/>
         </p:nvPicPr>
         <p:blipFill>
-          <a:blip r:embed="rId9"/>
+          <a:blip r:embed="rId10"/>
           <a:stretch>
             <a:fillRect/>
           </a:stretch>
         </p:blipFill>
         <p:spPr>
           <a:xfrm>
-            <a:off x="4425879" y="5698038"/>
-            <a:ext cx="118506" cy="118506"/>
+            <a:off x="4420596" y="5721076"/>
+            <a:ext cx="108753" cy="108753"/>
           </a:xfrm>
           <a:prstGeom prst="rect">
             <a:avLst/>
@@ -2365,14 +2448,14 @@
       </p:pic>
       <p:sp>
         <p:nvSpPr>
-          <p:cNvPr id="40" name="Text 29"/>
+          <p:cNvPr id="43" name="Text 31"/>
           <p:cNvSpPr txBox="1"/>
           <p:nvPr/>
         </p:nvSpPr>
         <p:spPr>
           <a:xfrm>
-            <a:off x="4727448" y="5607558"/>
-            <a:ext cx="1453896" cy="299466"/>
+            <a:off x="4707128" y="5643880"/>
+            <a:ext cx="1474216" cy="263144"/>
           </a:xfrm>
           <a:prstGeom prst="rect">
             <a:avLst/>
@@ -2404,7 +2487,7 @@
       </p:sp>
       <p:sp>
         <p:nvSpPr>
-          <p:cNvPr id="41" name="Shape 30"/>
+          <p:cNvPr id="44" name="Shape 32"/>
           <p:cNvSpPr/>
           <p:nvPr/>
         </p:nvSpPr>
@@ -2429,7 +2512,7 @@
       </p:sp>
       <p:sp>
         <p:nvSpPr>
-          <p:cNvPr id="42" name="Shape 31"/>
+          <p:cNvPr id="45" name="Shape 33"/>
           <p:cNvSpPr/>
           <p:nvPr/>
         </p:nvSpPr>
@@ -2454,7 +2537,7 @@
       </p:sp>
       <p:sp>
         <p:nvSpPr>
-          <p:cNvPr id="43" name="Shape 32"/>
+          <p:cNvPr id="46" name="Shape 34"/>
           <p:cNvSpPr/>
           <p:nvPr/>
         </p:nvSpPr>
@@ -2479,7 +2562,7 @@
       </p:sp>
       <p:sp>
         <p:nvSpPr>
-          <p:cNvPr id="44" name="Shape 33"/>
+          <p:cNvPr id="47" name="Shape 35"/>
           <p:cNvSpPr/>
           <p:nvPr/>
         </p:nvSpPr>
@@ -2504,7 +2587,7 @@
       </p:sp>
       <p:sp>
         <p:nvSpPr>
-          <p:cNvPr id="45" name="Shape 34"/>
+          <p:cNvPr id="48" name="Shape 36"/>
           <p:cNvSpPr/>
           <p:nvPr/>
         </p:nvSpPr>
@@ -2529,7 +2612,7 @@
       </p:sp>
       <p:sp>
         <p:nvSpPr>
-          <p:cNvPr id="46" name="Shape 35"/>
+          <p:cNvPr id="49" name="Shape 37"/>
           <p:cNvSpPr/>
           <p:nvPr/>
         </p:nvSpPr>
@@ -2553,7 +2636,7 @@
       </p:sp>
       <p:sp>
         <p:nvSpPr>
-          <p:cNvPr id="47" name="Shape 36"/>
+          <p:cNvPr id="50" name="Shape 38"/>
           <p:cNvSpPr/>
           <p:nvPr/>
         </p:nvSpPr>
@@ -2578,7 +2661,7 @@
       </p:sp>
       <p:sp>
         <p:nvSpPr>
-          <p:cNvPr id="48" name="Shape 37"/>
+          <p:cNvPr id="51" name="Shape 39"/>
           <p:cNvSpPr/>
           <p:nvPr/>
         </p:nvSpPr>
@@ -2603,7 +2686,7 @@
       </p:sp>
       <p:sp>
         <p:nvSpPr>
-          <p:cNvPr id="49" name="Shape 38"/>
+          <p:cNvPr id="52" name="Shape 40"/>
           <p:cNvSpPr/>
           <p:nvPr/>
         </p:nvSpPr>
@@ -2627,7 +2710,7 @@
       </p:sp>
       <p:sp>
         <p:nvSpPr>
-          <p:cNvPr id="50" name="Shape 39"/>
+          <p:cNvPr id="53" name="Shape 41"/>
           <p:cNvSpPr/>
           <p:nvPr/>
         </p:nvSpPr>
@@ -2651,7 +2734,7 @@
       </p:sp>
       <p:sp>
         <p:nvSpPr>
-          <p:cNvPr id="51" name="Shape 40"/>
+          <p:cNvPr id="54" name="Shape 42"/>
           <p:cNvSpPr/>
           <p:nvPr/>
         </p:nvSpPr>
@@ -2676,7 +2759,7 @@
       </p:sp>
       <p:sp>
         <p:nvSpPr>
-          <p:cNvPr id="52" name="Shape 41"/>
+          <p:cNvPr id="55" name="Shape 43"/>
           <p:cNvSpPr/>
           <p:nvPr/>
         </p:nvSpPr>
@@ -2700,7 +2783,7 @@
       </p:sp>
       <p:sp>
         <p:nvSpPr>
-          <p:cNvPr id="53" name="Shape 42"/>
+          <p:cNvPr id="56" name="Shape 44"/>
           <p:cNvSpPr/>
           <p:nvPr/>
         </p:nvSpPr>
@@ -2724,7 +2807,7 @@
       </p:sp>
       <p:sp>
         <p:nvSpPr>
-          <p:cNvPr id="54" name="Shape 43"/>
+          <p:cNvPr id="57" name="Shape 45"/>
           <p:cNvSpPr/>
           <p:nvPr/>
         </p:nvSpPr>
@@ -2758,7 +2841,7 @@
       </p:sp>
       <p:sp>
         <p:nvSpPr>
-          <p:cNvPr id="55" name="Shape 44"/>
+          <p:cNvPr id="58" name="Shape 46"/>
           <p:cNvSpPr/>
           <p:nvPr/>
         </p:nvSpPr>
@@ -2778,14 +2861,14 @@
       </p:sp>
       <p:pic>
         <p:nvPicPr>
-          <p:cNvPr id="56" name="Image 9" descr="preencoded.png">    </p:cNvPr>
+          <p:cNvPr id="59" name="Image 10" descr="preencoded.png">    </p:cNvPr>
           <p:cNvPicPr>
             <a:picLocks noChangeAspect="1"/>
           </p:cNvPicPr>
           <p:nvPr/>
         </p:nvPicPr>
         <p:blipFill>
-          <a:blip r:embed="rId10"/>
+          <a:blip r:embed="rId11"/>
           <a:stretch>
             <a:fillRect/>
           </a:stretch>
@@ -2802,7 +2885,7 @@
       </p:pic>
       <p:sp>
         <p:nvSpPr>
-          <p:cNvPr id="57" name="Text 45"/>
+          <p:cNvPr id="60" name="Text 47"/>
           <p:cNvSpPr txBox="1"/>
           <p:nvPr/>
         </p:nvSpPr>
@@ -2864,7 +2947,7 @@
       </p:sp>
       <p:sp>
         <p:nvSpPr>
-          <p:cNvPr id="58" name="Shape 46"/>
+          <p:cNvPr id="61" name="Shape 48"/>
           <p:cNvSpPr/>
           <p:nvPr/>
         </p:nvSpPr>
@@ -2898,7 +2981,7 @@
       </p:sp>
       <p:sp>
         <p:nvSpPr>
-          <p:cNvPr id="59" name="Shape 47"/>
+          <p:cNvPr id="62" name="Shape 49"/>
           <p:cNvSpPr/>
           <p:nvPr/>
         </p:nvSpPr>
@@ -2918,14 +3001,14 @@
       </p:sp>
       <p:pic>
         <p:nvPicPr>
-          <p:cNvPr id="60" name="Image 10" descr="preencoded.png">    </p:cNvPr>
+          <p:cNvPr id="63" name="Image 11" descr="preencoded.png">    </p:cNvPr>
           <p:cNvPicPr>
             <a:picLocks noChangeAspect="1"/>
           </p:cNvPicPr>
           <p:nvPr/>
         </p:nvPicPr>
         <p:blipFill>
-          <a:blip r:embed="rId11"/>
+          <a:blip r:embed="rId12"/>
           <a:stretch>
             <a:fillRect/>
           </a:stretch>
@@ -2942,7 +3025,7 @@
       </p:pic>
       <p:sp>
         <p:nvSpPr>
-          <p:cNvPr id="61" name="Text 48"/>
+          <p:cNvPr id="64" name="Text 50"/>
           <p:cNvSpPr txBox="1"/>
           <p:nvPr/>
         </p:nvSpPr>
@@ -3004,7 +3087,7 @@
       </p:sp>
       <p:sp>
         <p:nvSpPr>
-          <p:cNvPr id="62" name="Shape 49"/>
+          <p:cNvPr id="65" name="Shape 51"/>
           <p:cNvSpPr/>
           <p:nvPr/>
         </p:nvSpPr>
@@ -3038,7 +3121,7 @@
       </p:sp>
       <p:sp>
         <p:nvSpPr>
-          <p:cNvPr id="63" name="Shape 50"/>
+          <p:cNvPr id="66" name="Shape 52"/>
           <p:cNvSpPr/>
           <p:nvPr/>
         </p:nvSpPr>
@@ -3058,14 +3141,14 @@
       </p:sp>
       <p:pic>
         <p:nvPicPr>
-          <p:cNvPr id="64" name="Image 11" descr="preencoded.png">    </p:cNvPr>
+          <p:cNvPr id="67" name="Image 12" descr="preencoded.png">    </p:cNvPr>
           <p:cNvPicPr>
             <a:picLocks noChangeAspect="1"/>
           </p:cNvPicPr>
           <p:nvPr/>
         </p:nvPicPr>
         <p:blipFill>
-          <a:blip r:embed="rId12"/>
+          <a:blip r:embed="rId13"/>
           <a:stretch>
             <a:fillRect/>
           </a:stretch>
@@ -3082,7 +3165,7 @@
       </p:pic>
       <p:sp>
         <p:nvSpPr>
-          <p:cNvPr id="65" name="Text 51"/>
+          <p:cNvPr id="68" name="Text 53"/>
           <p:cNvSpPr txBox="1"/>
           <p:nvPr/>
         </p:nvSpPr>
@@ -3144,7 +3227,7 @@
       </p:sp>
       <p:sp>
         <p:nvSpPr>
-          <p:cNvPr id="66" name="Shape 52"/>
+          <p:cNvPr id="69" name="Shape 54"/>
           <p:cNvSpPr/>
           <p:nvPr/>
         </p:nvSpPr>
@@ -3178,7 +3261,7 @@
       </p:sp>
       <p:sp>
         <p:nvSpPr>
-          <p:cNvPr id="67" name="Shape 53"/>
+          <p:cNvPr id="70" name="Shape 55"/>
           <p:cNvSpPr/>
           <p:nvPr/>
         </p:nvSpPr>
@@ -3198,14 +3281,14 @@
       </p:sp>
       <p:pic>
         <p:nvPicPr>
-          <p:cNvPr id="68" name="Image 12" descr="preencoded.png">    </p:cNvPr>
+          <p:cNvPr id="71" name="Image 13" descr="preencoded.png">    </p:cNvPr>
           <p:cNvPicPr>
             <a:picLocks noChangeAspect="1"/>
           </p:cNvPicPr>
           <p:nvPr/>
         </p:nvPicPr>
         <p:blipFill>
-          <a:blip r:embed="rId13"/>
+          <a:blip r:embed="rId14"/>
           <a:stretch>
             <a:fillRect/>
           </a:stretch>
@@ -3222,7 +3305,7 @@
       </p:pic>
       <p:sp>
         <p:nvSpPr>
-          <p:cNvPr id="69" name="Text 54"/>
+          <p:cNvPr id="72" name="Text 56"/>
           <p:cNvSpPr txBox="1"/>
           <p:nvPr/>
         </p:nvSpPr>
@@ -3284,7 +3367,7 @@
       </p:sp>
       <p:sp>
         <p:nvSpPr>
-          <p:cNvPr id="70" name="Shape 55"/>
+          <p:cNvPr id="73" name="Shape 57"/>
           <p:cNvSpPr/>
           <p:nvPr/>
         </p:nvSpPr>
@@ -3318,7 +3401,7 @@
       </p:sp>
       <p:sp>
         <p:nvSpPr>
-          <p:cNvPr id="71" name="Shape 56"/>
+          <p:cNvPr id="74" name="Shape 58"/>
           <p:cNvSpPr/>
           <p:nvPr/>
         </p:nvSpPr>
@@ -3338,14 +3421,14 @@
       </p:sp>
       <p:pic>
         <p:nvPicPr>
-          <p:cNvPr id="72" name="Image 13" descr="preencoded.png">    </p:cNvPr>
+          <p:cNvPr id="75" name="Image 14" descr="preencoded.png">    </p:cNvPr>
           <p:cNvPicPr>
             <a:picLocks noChangeAspect="1"/>
           </p:cNvPicPr>
           <p:nvPr/>
         </p:nvPicPr>
         <p:blipFill>
-          <a:blip r:embed="rId14"/>
+          <a:blip r:embed="rId15"/>
           <a:stretch>
             <a:fillRect/>
           </a:stretch>
@@ -3362,7 +3445,7 @@
       </p:pic>
       <p:sp>
         <p:nvSpPr>
-          <p:cNvPr id="73" name="Text 57"/>
+          <p:cNvPr id="76" name="Text 59"/>
           <p:cNvSpPr txBox="1"/>
           <p:nvPr/>
         </p:nvSpPr>
@@ -3404,7 +3487,7 @@
       </p:sp>
       <p:sp>
         <p:nvSpPr>
-          <p:cNvPr id="74" name="Shape 58"/>
+          <p:cNvPr id="77" name="Shape 60"/>
           <p:cNvSpPr/>
           <p:nvPr/>
         </p:nvSpPr>
@@ -3438,7 +3521,7 @@
       </p:sp>
       <p:sp>
         <p:nvSpPr>
-          <p:cNvPr id="75" name="Shape 59"/>
+          <p:cNvPr id="78" name="Shape 61"/>
           <p:cNvSpPr/>
           <p:nvPr/>
         </p:nvSpPr>
@@ -3458,14 +3541,14 @@
       </p:sp>
       <p:pic>
         <p:nvPicPr>
-          <p:cNvPr id="76" name="Image 14" descr="preencoded.png">    </p:cNvPr>
+          <p:cNvPr id="79" name="Image 15" descr="preencoded.png">    </p:cNvPr>
           <p:cNvPicPr>
             <a:picLocks noChangeAspect="1"/>
           </p:cNvPicPr>
           <p:nvPr/>
         </p:nvPicPr>
         <p:blipFill>
-          <a:blip r:embed="rId15"/>
+          <a:blip r:embed="rId16"/>
           <a:stretch>
             <a:fillRect/>
           </a:stretch>
@@ -3482,7 +3565,7 @@
       </p:pic>
       <p:sp>
         <p:nvSpPr>
-          <p:cNvPr id="77" name="Text 60"/>
+          <p:cNvPr id="80" name="Text 62"/>
           <p:cNvSpPr txBox="1"/>
           <p:nvPr/>
         </p:nvSpPr>
@@ -3544,7 +3627,7 @@
       </p:sp>
       <p:sp>
         <p:nvSpPr>
-          <p:cNvPr id="78" name="Shape 61"/>
+          <p:cNvPr id="81" name="Shape 63"/>
           <p:cNvSpPr/>
           <p:nvPr/>
         </p:nvSpPr>
@@ -3578,7 +3661,7 @@
       </p:sp>
       <p:sp>
         <p:nvSpPr>
-          <p:cNvPr id="79" name="Shape 62"/>
+          <p:cNvPr id="82" name="Shape 64"/>
           <p:cNvSpPr/>
           <p:nvPr/>
         </p:nvSpPr>
@@ -3598,14 +3681,14 @@
       </p:sp>
       <p:pic>
         <p:nvPicPr>
-          <p:cNvPr id="80" name="Image 15" descr="preencoded.png">    </p:cNvPr>
+          <p:cNvPr id="83" name="Image 16" descr="preencoded.png">    </p:cNvPr>
           <p:cNvPicPr>
             <a:picLocks noChangeAspect="1"/>
           </p:cNvPicPr>
           <p:nvPr/>
         </p:nvPicPr>
         <p:blipFill>
-          <a:blip r:embed="rId16"/>
+          <a:blip r:embed="rId17"/>
           <a:stretch>
             <a:fillRect/>
           </a:stretch>
@@ -3622,7 +3705,7 @@
       </p:pic>
       <p:sp>
         <p:nvSpPr>
-          <p:cNvPr id="81" name="Text 63"/>
+          <p:cNvPr id="84" name="Text 65"/>
           <p:cNvSpPr txBox="1"/>
           <p:nvPr/>
         </p:nvSpPr>
@@ -3664,7 +3747,7 @@
       </p:sp>
       <p:sp>
         <p:nvSpPr>
-          <p:cNvPr id="82" name="Shape 64"/>
+          <p:cNvPr id="85" name="Shape 66"/>
           <p:cNvSpPr/>
           <p:nvPr/>
         </p:nvSpPr>
@@ -3698,7 +3781,7 @@
       </p:sp>
       <p:sp>
         <p:nvSpPr>
-          <p:cNvPr id="83" name="Shape 65"/>
+          <p:cNvPr id="86" name="Shape 67"/>
           <p:cNvSpPr/>
           <p:nvPr/>
         </p:nvSpPr>
@@ -3718,14 +3801,14 @@
       </p:sp>
       <p:pic>
         <p:nvPicPr>
-          <p:cNvPr id="84" name="Image 16" descr="preencoded.png">    </p:cNvPr>
+          <p:cNvPr id="87" name="Image 17" descr="preencoded.png">    </p:cNvPr>
           <p:cNvPicPr>
             <a:picLocks noChangeAspect="1"/>
           </p:cNvPicPr>
           <p:nvPr/>
         </p:nvPicPr>
         <p:blipFill>
-          <a:blip r:embed="rId17"/>
+          <a:blip r:embed="rId18"/>
           <a:stretch>
             <a:fillRect/>
           </a:stretch>
@@ -3742,7 +3825,7 @@
       </p:pic>
       <p:sp>
         <p:nvSpPr>
-          <p:cNvPr id="85" name="Text 66"/>
+          <p:cNvPr id="88" name="Text 68"/>
           <p:cNvSpPr txBox="1"/>
           <p:nvPr/>
         </p:nvSpPr>
@@ -3784,7 +3867,7 @@
       </p:sp>
       <p:sp>
         <p:nvSpPr>
-          <p:cNvPr id="86" name="Shape 67"/>
+          <p:cNvPr id="89" name="Shape 69"/>
           <p:cNvSpPr/>
           <p:nvPr/>
         </p:nvSpPr>
@@ -3818,7 +3901,7 @@
       </p:sp>
       <p:sp>
         <p:nvSpPr>
-          <p:cNvPr id="87" name="Shape 68"/>
+          <p:cNvPr id="90" name="Shape 70"/>
           <p:cNvSpPr/>
           <p:nvPr/>
         </p:nvSpPr>
@@ -3838,14 +3921,14 @@
       </p:sp>
       <p:pic>
         <p:nvPicPr>
-          <p:cNvPr id="88" name="Image 17" descr="preencoded.png">    </p:cNvPr>
+          <p:cNvPr id="91" name="Image 18" descr="preencoded.png">    </p:cNvPr>
           <p:cNvPicPr>
             <a:picLocks noChangeAspect="1"/>
           </p:cNvPicPr>
           <p:nvPr/>
         </p:nvPicPr>
         <p:blipFill>
-          <a:blip r:embed="rId18"/>
+          <a:blip r:embed="rId19"/>
           <a:stretch>
             <a:fillRect/>
           </a:stretch>
@@ -3862,7 +3945,7 @@
       </p:pic>
       <p:sp>
         <p:nvSpPr>
-          <p:cNvPr id="89" name="Text 69"/>
+          <p:cNvPr id="92" name="Text 71"/>
           <p:cNvSpPr txBox="1"/>
           <p:nvPr/>
         </p:nvSpPr>
@@ -3904,7 +3987,7 @@
       </p:sp>
       <p:sp>
         <p:nvSpPr>
-          <p:cNvPr id="90" name="Shape 70"/>
+          <p:cNvPr id="93" name="Shape 72"/>
           <p:cNvSpPr/>
           <p:nvPr/>
         </p:nvSpPr>
@@ -3938,7 +4021,7 @@
       </p:sp>
       <p:sp>
         <p:nvSpPr>
-          <p:cNvPr id="91" name="Shape 71"/>
+          <p:cNvPr id="94" name="Shape 73"/>
           <p:cNvSpPr/>
           <p:nvPr/>
         </p:nvSpPr>
@@ -3958,14 +4041,14 @@
       </p:sp>
       <p:pic>
         <p:nvPicPr>
-          <p:cNvPr id="92" name="Image 18" descr="preencoded.png">    </p:cNvPr>
+          <p:cNvPr id="95" name="Image 19" descr="preencoded.png">    </p:cNvPr>
           <p:cNvPicPr>
             <a:picLocks noChangeAspect="1"/>
           </p:cNvPicPr>
           <p:nvPr/>
         </p:nvPicPr>
         <p:blipFill>
-          <a:blip r:embed="rId19"/>
+          <a:blip r:embed="rId20"/>
           <a:stretch>
             <a:fillRect/>
           </a:stretch>
@@ -3982,7 +4065,7 @@
       </p:pic>
       <p:sp>
         <p:nvSpPr>
-          <p:cNvPr id="93" name="Text 72"/>
+          <p:cNvPr id="96" name="Text 74"/>
           <p:cNvSpPr txBox="1"/>
           <p:nvPr/>
         </p:nvSpPr>
@@ -4024,7 +4107,7 @@
       </p:sp>
       <p:sp>
         <p:nvSpPr>
-          <p:cNvPr id="94" name="Shape 73"/>
+          <p:cNvPr id="97" name="Shape 75"/>
           <p:cNvSpPr/>
           <p:nvPr/>
         </p:nvSpPr>
@@ -4058,7 +4141,7 @@
       </p:sp>
       <p:sp>
         <p:nvSpPr>
-          <p:cNvPr id="95" name="Shape 74"/>
+          <p:cNvPr id="98" name="Shape 76"/>
           <p:cNvSpPr/>
           <p:nvPr/>
         </p:nvSpPr>
@@ -4078,14 +4161,14 @@
       </p:sp>
       <p:pic>
         <p:nvPicPr>
-          <p:cNvPr id="96" name="Image 19" descr="preencoded.png">    </p:cNvPr>
+          <p:cNvPr id="99" name="Image 20" descr="preencoded.png">    </p:cNvPr>
           <p:cNvPicPr>
             <a:picLocks noChangeAspect="1"/>
           </p:cNvPicPr>
           <p:nvPr/>
         </p:nvPicPr>
         <p:blipFill>
-          <a:blip r:embed="rId20"/>
+          <a:blip r:embed="rId21"/>
           <a:stretch>
             <a:fillRect/>
           </a:stretch>
@@ -4102,7 +4185,7 @@
       </p:pic>
       <p:sp>
         <p:nvSpPr>
-          <p:cNvPr id="97" name="Text 75"/>
+          <p:cNvPr id="100" name="Text 77"/>
           <p:cNvSpPr txBox="1"/>
           <p:nvPr/>
         </p:nvSpPr>
@@ -4164,7 +4247,7 @@
       </p:sp>
       <p:sp>
         <p:nvSpPr>
-          <p:cNvPr id="98" name="Shape 76"/>
+          <p:cNvPr id="101" name="Shape 78"/>
           <p:cNvSpPr/>
           <p:nvPr/>
         </p:nvSpPr>
@@ -4198,7 +4281,7 @@
       </p:sp>
       <p:sp>
         <p:nvSpPr>
-          <p:cNvPr id="99" name="Shape 77"/>
+          <p:cNvPr id="102" name="Shape 79"/>
           <p:cNvSpPr/>
           <p:nvPr/>
         </p:nvSpPr>
@@ -4218,14 +4301,14 @@
       </p:sp>
       <p:pic>
         <p:nvPicPr>
-          <p:cNvPr id="100" name="Image 20" descr="preencoded.png">    </p:cNvPr>
+          <p:cNvPr id="103" name="Image 21" descr="preencoded.png">    </p:cNvPr>
           <p:cNvPicPr>
             <a:picLocks noChangeAspect="1"/>
           </p:cNvPicPr>
           <p:nvPr/>
         </p:nvPicPr>
         <p:blipFill>
-          <a:blip r:embed="rId21"/>
+          <a:blip r:embed="rId22"/>
           <a:stretch>
             <a:fillRect/>
           </a:stretch>
@@ -4242,7 +4325,7 @@
       </p:pic>
       <p:sp>
         <p:nvSpPr>
-          <p:cNvPr id="101" name="Text 78"/>
+          <p:cNvPr id="104" name="Text 80"/>
           <p:cNvSpPr txBox="1"/>
           <p:nvPr/>
         </p:nvSpPr>
@@ -4304,7 +4387,7 @@
       </p:sp>
       <p:sp>
         <p:nvSpPr>
-          <p:cNvPr id="102" name="Shape 79"/>
+          <p:cNvPr id="105" name="Shape 81"/>
           <p:cNvSpPr/>
           <p:nvPr/>
         </p:nvSpPr>
@@ -4338,7 +4421,7 @@
       </p:sp>
       <p:sp>
         <p:nvSpPr>
-          <p:cNvPr id="103" name="Shape 80"/>
+          <p:cNvPr id="106" name="Shape 82"/>
           <p:cNvSpPr/>
           <p:nvPr/>
         </p:nvSpPr>
@@ -4358,14 +4441,14 @@
       </p:sp>
       <p:pic>
         <p:nvPicPr>
-          <p:cNvPr id="104" name="Image 21" descr="preencoded.png">    </p:cNvPr>
+          <p:cNvPr id="107" name="Image 22" descr="preencoded.png">    </p:cNvPr>
           <p:cNvPicPr>
             <a:picLocks noChangeAspect="1"/>
           </p:cNvPicPr>
           <p:nvPr/>
         </p:nvPicPr>
         <p:blipFill>
-          <a:blip r:embed="rId22"/>
+          <a:blip r:embed="rId23"/>
           <a:stretch>
             <a:fillRect/>
           </a:stretch>
@@ -4382,7 +4465,7 @@
       </p:pic>
       <p:sp>
         <p:nvSpPr>
-          <p:cNvPr id="105" name="Text 81"/>
+          <p:cNvPr id="108" name="Text 83"/>
           <p:cNvSpPr txBox="1"/>
           <p:nvPr/>
         </p:nvSpPr>
@@ -4444,7 +4527,7 @@
       </p:sp>
       <p:sp>
         <p:nvSpPr>
-          <p:cNvPr id="106" name="Text 82"/>
+          <p:cNvPr id="109" name="Text 84"/>
           <p:cNvSpPr txBox="1"/>
           <p:nvPr/>
         </p:nvSpPr>
@@ -4483,7 +4566,7 @@
       </p:sp>
       <p:sp>
         <p:nvSpPr>
-          <p:cNvPr id="107" name="Text 83"/>
+          <p:cNvPr id="110" name="Text 85"/>
           <p:cNvSpPr txBox="1"/>
           <p:nvPr/>
         </p:nvSpPr>
@@ -4522,7 +4605,7 @@
       </p:sp>
       <p:sp>
         <p:nvSpPr>
-          <p:cNvPr id="108" name="Text 84"/>
+          <p:cNvPr id="111" name="Text 86"/>
           <p:cNvSpPr txBox="1"/>
           <p:nvPr/>
         </p:nvSpPr>

--- a/docs/presentations/Transfer_Agent_Data_Flow.pptx
+++ b/docs/presentations/Transfer_Agent_Data_Flow.pptx
@@ -1981,7 +1981,7 @@
                 <a:ea typeface="Calibri" pitchFamily="34" charset="-122"/>
                 <a:cs typeface="Calibri" pitchFamily="34" charset="-120"/>
               </a:rPr>
-              <a:t>Cash</a:t>
+              <a:t>Payments</a:t>
             </a:r>
             <a:endParaRPr lang="en-US" sz="1050" dirty="0"/>
           </a:p>
@@ -2396,7 +2396,7 @@
                 <a:ea typeface="Calibri" pitchFamily="34" charset="-122"/>
                 <a:cs typeface="Calibri" pitchFamily="34" charset="-120"/>
               </a:rPr>
-              <a:t>Payments</a:t>
+              <a:t>Fund Billing</a:t>
             </a:r>
             <a:endParaRPr lang="en-US" sz="1050" dirty="0"/>
           </a:p>
@@ -2479,7 +2479,7 @@
                 <a:ea typeface="Calibri" pitchFamily="34" charset="-122"/>
                 <a:cs typeface="Calibri" pitchFamily="34" charset="-120"/>
               </a:rPr>
-              <a:t>Fund Billing</a:t>
+              <a:t>Reconciliation</a:t>
             </a:r>
             <a:endParaRPr lang="en-US" sz="1050" dirty="0"/>
           </a:p>
